--- a/slides/Presentation.pptx
+++ b/slides/Presentation.pptx
@@ -4,6 +4,9 @@
   <p:sldMasterIdLst>
     <p:sldMasterId id="2147483648" r:id="rId1"/>
   </p:sldMasterIdLst>
+  <p:notesMasterIdLst>
+    <p:notesMasterId r:id="rId17"/>
+  </p:notesMasterIdLst>
   <p:sldIdLst>
     <p:sldId id="256" r:id="rId2"/>
     <p:sldId id="257" r:id="rId3"/>
@@ -21,9 +24,6 @@
     <p:sldId id="269" r:id="rId15"/>
     <p:sldId id="270" r:id="rId16"/>
   </p:sldIdLst>
-  <p:notesMasterIdLst>
-    <p:notesMasterId r:id="rId17"/>
-  </p:notesMasterIdLst>
   <p:sldSz cx="12192000" cy="6858000"/>
   <p:notesSz cx="6858000" cy="12192000"/>
   <p:defaultTextStyle>
@@ -118,13 +118,20 @@
       </a:defRPr>
     </a:lvl9pPr>
   </p:defaultTextStyle>
+  <p:extLst>
+    <p:ext uri="{EFAFB233-063F-42B5-8137-9DF3F51BA10A}">
+      <p15:sldGuideLst xmlns:p15="http://schemas.microsoft.com/office/powerpoint/2012/main"/>
+    </p:ext>
+  </p:extLst>
 </p:presentation>
 </file>
 
 <file path=ppt/charts/chart1.xml><?xml version="1.0" encoding="utf-8"?>
-<c:chartSpace xmlns:c="http://schemas.openxmlformats.org/drawingml/2006/chart" xmlns:a="http://schemas.openxmlformats.org/drawingml/2006/main" xmlns:r="http://schemas.openxmlformats.org/officeDocument/2006/relationships">
+<c:chartSpace xmlns:c="http://schemas.openxmlformats.org/drawingml/2006/chart" xmlns:a="http://schemas.openxmlformats.org/drawingml/2006/main" xmlns:r="http://schemas.openxmlformats.org/officeDocument/2006/relationships" xmlns:c16r2="http://schemas.microsoft.com/office/drawing/2015/06/chart">
   <c:date1904 val="0"/>
+  <c:lang val="en-US"/>
   <c:roundedCorners val="1"/>
+  <c:style val="2"/>
   <c:chart>
     <c:autoTitleDeleted val="1"/>
     <c:plotArea>
@@ -156,18 +163,26 @@
           <c:invertIfNegative val="0"/>
           <c:dLbls>
             <c:numFmt formatCode="#,##0" sourceLinked="0"/>
+            <c:spPr>
+              <a:noFill/>
+              <a:ln>
+                <a:noFill/>
+              </a:ln>
+              <a:effectLst/>
+            </c:spPr>
             <c:txPr>
               <a:bodyPr/>
               <a:lstStyle/>
               <a:p>
                 <a:pPr>
-                  <a:defRPr b="1" i="0" strike="noStrike" sz="1300" u="none">
+                  <a:defRPr sz="1300" b="1" i="0" u="none" strike="noStrike">
                     <a:solidFill>
                       <a:srgbClr val="FFFFFF"/>
                     </a:solidFill>
                     <a:latin typeface="Arial"/>
                   </a:defRPr>
                 </a:pPr>
+                <a:endParaRPr lang="en-US"/>
               </a:p>
             </c:txPr>
             <c:dLblPos val="ctr"/>
@@ -178,22 +193,25 @@
             <c:showPercent val="0"/>
             <c:showBubbleSize val="0"/>
             <c:showLeaderLines val="0"/>
+            <c:extLst>
+              <c:ext xmlns:c15="http://schemas.microsoft.com/office/drawing/2012/chart" uri="{CE6537A1-D6FC-4f65-9D91-7224C49458BB}">
+                <c15:showLeaderLines val="0"/>
+              </c:ext>
+            </c:extLst>
           </c:dLbls>
           <c:cat>
-            <c:multiLvlStrRef>
+            <c:strRef>
               <c:f>Sheet1!$A$2:$A$3</c:f>
-              <c:multiLvlStrCache>
+              <c:strCache>
                 <c:ptCount val="2"/>
-                <c:lvl>
-                  <c:pt idx="0">
-                    <c:v>Before correction</c:v>
-                  </c:pt>
-                  <c:pt idx="1">
-                    <c:v>After correction</c:v>
-                  </c:pt>
-                </c:lvl>
-              </c:multiLvlStrCache>
-            </c:multiLvlStrRef>
+                <c:pt idx="0">
+                  <c:v>Before correction</c:v>
+                </c:pt>
+                <c:pt idx="1">
+                  <c:v>After correction</c:v>
+                </c:pt>
+              </c:strCache>
+            </c:strRef>
           </c:cat>
           <c:val>
             <c:numRef>
@@ -210,6 +228,11 @@
               </c:numCache>
             </c:numRef>
           </c:val>
+          <c:extLst>
+            <c:ext xmlns:c16="http://schemas.microsoft.com/office/drawing/2014/chart" uri="{C3380CC4-5D6E-409C-BE32-E72D297353CC}">
+              <c16:uniqueId val="{00000000-7633-F247-B381-C3A2587D1C2B}"/>
+            </c:ext>
+          </c:extLst>
         </c:ser>
         <c:ser>
           <c:idx val="1"/>
@@ -234,18 +257,26 @@
           <c:invertIfNegative val="0"/>
           <c:dLbls>
             <c:numFmt formatCode="#,##0" sourceLinked="0"/>
+            <c:spPr>
+              <a:noFill/>
+              <a:ln>
+                <a:noFill/>
+              </a:ln>
+              <a:effectLst/>
+            </c:spPr>
             <c:txPr>
               <a:bodyPr/>
               <a:lstStyle/>
               <a:p>
                 <a:pPr>
-                  <a:defRPr b="1" i="0" strike="noStrike" sz="1300" u="none">
+                  <a:defRPr sz="1300" b="1" i="0" u="none" strike="noStrike">
                     <a:solidFill>
                       <a:srgbClr val="FFFFFF"/>
                     </a:solidFill>
                     <a:latin typeface="Arial"/>
                   </a:defRPr>
                 </a:pPr>
+                <a:endParaRPr lang="en-US"/>
               </a:p>
             </c:txPr>
             <c:dLblPos val="ctr"/>
@@ -256,22 +287,25 @@
             <c:showPercent val="0"/>
             <c:showBubbleSize val="0"/>
             <c:showLeaderLines val="0"/>
+            <c:extLst>
+              <c:ext xmlns:c15="http://schemas.microsoft.com/office/drawing/2012/chart" uri="{CE6537A1-D6FC-4f65-9D91-7224C49458BB}">
+                <c15:showLeaderLines val="0"/>
+              </c:ext>
+            </c:extLst>
           </c:dLbls>
           <c:cat>
-            <c:multiLvlStrRef>
+            <c:strRef>
               <c:f>Sheet1!$A$2:$A$3</c:f>
-              <c:multiLvlStrCache>
+              <c:strCache>
                 <c:ptCount val="2"/>
-                <c:lvl>
-                  <c:pt idx="0">
-                    <c:v>Before correction</c:v>
-                  </c:pt>
-                  <c:pt idx="1">
-                    <c:v>After correction</c:v>
-                  </c:pt>
-                </c:lvl>
-              </c:multiLvlStrCache>
-            </c:multiLvlStrRef>
+                <c:pt idx="0">
+                  <c:v>Before correction</c:v>
+                </c:pt>
+                <c:pt idx="1">
+                  <c:v>After correction</c:v>
+                </c:pt>
+              </c:strCache>
+            </c:strRef>
           </c:cat>
           <c:val>
             <c:numRef>
@@ -288,6 +322,11 @@
               </c:numCache>
             </c:numRef>
           </c:val>
+          <c:extLst>
+            <c:ext xmlns:c16="http://schemas.microsoft.com/office/drawing/2014/chart" uri="{C3380CC4-5D6E-409C-BE32-E72D297353CC}">
+              <c16:uniqueId val="{00000001-7633-F247-B381-C3A2587D1C2B}"/>
+            </c:ext>
+          </c:extLst>
         </c:ser>
         <c:ser>
           <c:idx val="2"/>
@@ -312,18 +351,26 @@
           <c:invertIfNegative val="0"/>
           <c:dLbls>
             <c:numFmt formatCode="#,##0" sourceLinked="0"/>
+            <c:spPr>
+              <a:noFill/>
+              <a:ln>
+                <a:noFill/>
+              </a:ln>
+              <a:effectLst/>
+            </c:spPr>
             <c:txPr>
               <a:bodyPr/>
               <a:lstStyle/>
               <a:p>
                 <a:pPr>
-                  <a:defRPr b="1" i="0" strike="noStrike" sz="1300" u="none">
+                  <a:defRPr sz="1300" b="1" i="0" u="none" strike="noStrike">
                     <a:solidFill>
                       <a:srgbClr val="FFFFFF"/>
                     </a:solidFill>
                     <a:latin typeface="Arial"/>
                   </a:defRPr>
                 </a:pPr>
+                <a:endParaRPr lang="en-US"/>
               </a:p>
             </c:txPr>
             <c:dLblPos val="ctr"/>
@@ -334,22 +381,25 @@
             <c:showPercent val="0"/>
             <c:showBubbleSize val="0"/>
             <c:showLeaderLines val="0"/>
+            <c:extLst>
+              <c:ext xmlns:c15="http://schemas.microsoft.com/office/drawing/2012/chart" uri="{CE6537A1-D6FC-4f65-9D91-7224C49458BB}">
+                <c15:showLeaderLines val="0"/>
+              </c:ext>
+            </c:extLst>
           </c:dLbls>
           <c:cat>
-            <c:multiLvlStrRef>
+            <c:strRef>
               <c:f>Sheet1!$A$2:$A$3</c:f>
-              <c:multiLvlStrCache>
+              <c:strCache>
                 <c:ptCount val="2"/>
-                <c:lvl>
-                  <c:pt idx="0">
-                    <c:v>Before correction</c:v>
-                  </c:pt>
-                  <c:pt idx="1">
-                    <c:v>After correction</c:v>
-                  </c:pt>
-                </c:lvl>
-              </c:multiLvlStrCache>
-            </c:multiLvlStrRef>
+                <c:pt idx="0">
+                  <c:v>Before correction</c:v>
+                </c:pt>
+                <c:pt idx="1">
+                  <c:v>After correction</c:v>
+                </c:pt>
+              </c:strCache>
+            </c:strRef>
           </c:cat>
           <c:val>
             <c:numRef>
@@ -366,23 +416,13 @@
               </c:numCache>
             </c:numRef>
           </c:val>
+          <c:extLst>
+            <c:ext xmlns:c16="http://schemas.microsoft.com/office/drawing/2014/chart" uri="{C3380CC4-5D6E-409C-BE32-E72D297353CC}">
+              <c16:uniqueId val="{00000002-7633-F247-B381-C3A2587D1C2B}"/>
+            </c:ext>
+          </c:extLst>
         </c:ser>
         <c:dLbls>
-          <c:numFmt formatCode="#,##0" sourceLinked="0"/>
-          <c:txPr>
-            <a:bodyPr/>
-            <a:lstStyle/>
-            <a:p>
-              <a:pPr>
-                <a:defRPr b="1" i="0" strike="noStrike" sz="1300" u="none">
-                  <a:solidFill>
-                    <a:srgbClr val="FFFFFF"/>
-                  </a:solidFill>
-                  <a:latin typeface="Arial"/>
-                </a:defRPr>
-              </a:pPr>
-            </a:p>
-          </c:txPr>
           <c:dLblPos val="ctr"/>
           <c:showLegendKey val="0"/>
           <c:showVal val="1"/>
@@ -390,13 +430,11 @@
           <c:showSerName val="0"/>
           <c:showPercent val="0"/>
           <c:showBubbleSize val="0"/>
-          <c:showLeaderLines val="0"/>
         </c:dLbls>
         <c:gapWidth val="50"/>
         <c:overlap val="100"/>
         <c:axId val="2094734554"/>
         <c:axId val="2094734552"/>
-        <c:axId val="2094734556"/>
       </c:barChart>
       <c:catAx>
         <c:axId val="2094734554"/>
@@ -437,6 +475,7 @@
         <c:crosses val="autoZero"/>
         <c:auto val="1"/>
         <c:lblAlgn val="ctr"/>
+        <c:lblOffset val="100"/>
         <c:noMultiLvlLbl val="1"/>
       </c:catAx>
       <c:valAx>
@@ -505,7 +544,7 @@
         <a:lstStyle/>
         <a:p>
           <a:pPr>
-            <a:defRPr sz="1200">      </a:defRPr>
+            <a:defRPr sz="1200"/>
           </a:pPr>
           <a:endParaRPr lang="en-US"/>
         </a:p>
@@ -513,6 +552,7 @@
     </c:legend>
     <c:plotVisOnly val="1"/>
     <c:dispBlanksAs val="span"/>
+    <c:showDLblsOverMax val="1"/>
   </c:chart>
   <c:spPr>
     <a:noFill/>
@@ -549,234 +589,10 @@
           <a:chExt cx="0" cy="0"/>
         </a:xfrm>
       </p:grpSpPr>
-      <p:sp>
-        <p:nvSpPr>
-          <p:cNvPr id="2" name="Header Placeholder 1"/>
-          <p:cNvSpPr>
-            <a:spLocks noGrp="1"/>
-          </p:cNvSpPr>
-          <p:nvPr>
-            <p:ph type="hdr" sz="quarter"/>
-          </p:nvPr>
-        </p:nvSpPr>
-        <p:spPr>
-          <a:xfrm>
-            <a:off x="0" y="0"/>
-            <a:ext cx="2971800" cy="458788"/>
-          </a:xfrm>
-          <a:prstGeom prst="rect">
-            <a:avLst/>
-          </a:prstGeom>
-        </p:spPr>
-        <p:txBody>
-          <a:bodyPr vert="horz" lIns="91440" tIns="45720" rIns="91440" bIns="45720" rtlCol="0"/>
-          <a:lstStyle>
-            <a:lvl1pPr algn="l">
-              <a:defRPr sz="1200"/>
-            </a:lvl1pPr>
-          </a:lstStyle>
-          <a:p>
-            <a:endParaRPr lang="en-US"/>
-          </a:p>
-        </p:txBody>
-      </p:sp>
-      <p:sp>
-        <p:nvSpPr>
-          <p:cNvPr id="3" name="Date Placeholder 2"/>
-          <p:cNvSpPr>
-            <a:spLocks noGrp="1"/>
-          </p:cNvSpPr>
-          <p:nvPr>
-            <p:ph type="dt" idx="1"/>
-          </p:nvPr>
-        </p:nvSpPr>
-        <p:spPr>
-          <a:xfrm>
-            <a:off x="3884613" y="0"/>
-            <a:ext cx="2971800" cy="458788"/>
-          </a:xfrm>
-          <a:prstGeom prst="rect">
-            <a:avLst/>
-          </a:prstGeom>
-        </p:spPr>
-        <p:txBody>
-          <a:bodyPr vert="horz" lIns="91440" tIns="45720" rIns="91440" bIns="45720" rtlCol="0"/>
-          <a:lstStyle>
-            <a:lvl1pPr algn="r">
-              <a:defRPr sz="1200"/>
-            </a:lvl1pPr>
-          </a:lstStyle>
-          <a:p>
-            <a:fld id="{5282F153-3F37-0F45-9E97-73ACFA13230C}" type="datetimeFigureOut">
-              <a:rPr lang="en-US"/>
-              <a:t>7/23/19</a:t>
-            </a:fld>
-            <a:endParaRPr lang="en-US"/>
-          </a:p>
-        </p:txBody>
-      </p:sp>
-      <p:sp>
-        <p:nvSpPr>
-          <p:cNvPr id="4" name="Slide Image Placeholder 3"/>
-          <p:cNvSpPr>
-            <a:spLocks noGrp="1" noRot="1" noChangeAspect="1"/>
-          </p:cNvSpPr>
-          <p:nvPr>
-            <p:ph type="sldImg" idx="2"/>
-          </p:nvPr>
-        </p:nvSpPr>
-        <p:spPr>
-          <a:xfrm>
-            <a:off x="685800" y="1143000"/>
-            <a:ext cx="5486400" cy="3086100"/>
-          </a:xfrm>
-          <a:prstGeom prst="rect">
-            <a:avLst/>
-          </a:prstGeom>
-          <a:noFill/>
-          <a:ln w="12700">
-            <a:solidFill>
-              <a:prstClr val="black"/>
-            </a:solidFill>
-          </a:ln>
-        </p:spPr>
-        <p:txBody>
-          <a:bodyPr vert="horz" lIns="91440" tIns="45720" rIns="91440" bIns="45720" rtlCol="0" anchor="ctr"/>
-          <a:lstStyle/>
-          <a:p>
-            <a:endParaRPr lang="en-US"/>
-          </a:p>
-        </p:txBody>
-      </p:sp>
-      <p:sp>
-        <p:nvSpPr>
-          <p:cNvPr id="5" name="Notes Placeholder 4"/>
-          <p:cNvSpPr>
-            <a:spLocks noGrp="1"/>
-          </p:cNvSpPr>
-          <p:nvPr>
-            <p:ph type="body" sz="quarter" idx="3"/>
-          </p:nvPr>
-        </p:nvSpPr>
-        <p:spPr>
-          <a:xfrm>
-            <a:off x="685800" y="4400550"/>
-            <a:ext cx="5486400" cy="3600450"/>
-          </a:xfrm>
-          <a:prstGeom prst="rect">
-            <a:avLst/>
-          </a:prstGeom>
-        </p:spPr>
-        <p:txBody>
-          <a:bodyPr vert="horz" lIns="91440" tIns="45720" rIns="91440" bIns="45720" rtlCol="0"/>
-          <a:lstStyle/>
-          <a:p>
-            <a:pPr lvl="0"/>
-            <a:r>
-              <a:rPr lang="en-US"/>
-              <a:t>Click to edit Master text styles</a:t>
-            </a:r>
-          </a:p>
-          <a:p>
-            <a:pPr lvl="1"/>
-            <a:r>
-              <a:rPr lang="en-US"/>
-              <a:t>Second level</a:t>
-            </a:r>
-          </a:p>
-          <a:p>
-            <a:pPr lvl="2"/>
-            <a:r>
-              <a:rPr lang="en-US"/>
-              <a:t>Third level</a:t>
-            </a:r>
-          </a:p>
-          <a:p>
-            <a:pPr lvl="3"/>
-            <a:r>
-              <a:rPr lang="en-US"/>
-              <a:t>Fourth level</a:t>
-            </a:r>
-          </a:p>
-          <a:p>
-            <a:pPr lvl="4"/>
-            <a:r>
-              <a:rPr lang="en-US"/>
-              <a:t>Fifth level</a:t>
-            </a:r>
-          </a:p>
-        </p:txBody>
-      </p:sp>
-      <p:sp>
-        <p:nvSpPr>
-          <p:cNvPr id="6" name="Footer Placeholder 5"/>
-          <p:cNvSpPr>
-            <a:spLocks noGrp="1"/>
-          </p:cNvSpPr>
-          <p:nvPr>
-            <p:ph type="ftr" sz="quarter" idx="4"/>
-          </p:nvPr>
-        </p:nvSpPr>
-        <p:spPr>
-          <a:xfrm>
-            <a:off x="0" y="8685213"/>
-            <a:ext cx="2971800" cy="458787"/>
-          </a:xfrm>
-          <a:prstGeom prst="rect">
-            <a:avLst/>
-          </a:prstGeom>
-        </p:spPr>
-        <p:txBody>
-          <a:bodyPr vert="horz" lIns="91440" tIns="45720" rIns="91440" bIns="45720" rtlCol="0" anchor="b"/>
-          <a:lstStyle>
-            <a:lvl1pPr algn="l">
-              <a:defRPr sz="1200"/>
-            </a:lvl1pPr>
-          </a:lstStyle>
-          <a:p>
-            <a:endParaRPr lang="en-US"/>
-          </a:p>
-        </p:txBody>
-      </p:sp>
-      <p:sp>
-        <p:nvSpPr>
-          <p:cNvPr id="7" name="Slide Number Placeholder 6"/>
-          <p:cNvSpPr>
-            <a:spLocks noGrp="1"/>
-          </p:cNvSpPr>
-          <p:nvPr>
-            <p:ph type="sldNum" sz="quarter" idx="5"/>
-          </p:nvPr>
-        </p:nvSpPr>
-        <p:spPr>
-          <a:xfrm>
-            <a:off x="3884613" y="8685213"/>
-            <a:ext cx="2971800" cy="458787"/>
-          </a:xfrm>
-          <a:prstGeom prst="rect">
-            <a:avLst/>
-          </a:prstGeom>
-        </p:spPr>
-        <p:txBody>
-          <a:bodyPr vert="horz" lIns="91440" tIns="45720" rIns="91440" bIns="45720" rtlCol="0" anchor="b"/>
-          <a:lstStyle>
-            <a:lvl1pPr algn="r">
-              <a:defRPr sz="1200"/>
-            </a:lvl1pPr>
-          </a:lstStyle>
-          <a:p>
-            <a:fld id="{CE5E9CC1-C706-0F49-92D6-E571CC5EEA8F}" type="slidenum">
-              <a:rPr lang="en-US"/>
-              <a:t>‹#›</a:t>
-            </a:fld>
-            <a:endParaRPr lang="en-US"/>
-          </a:p>
-        </p:txBody>
-      </p:sp>
     </p:spTree>
     <p:extLst>
       <p:ext uri="{BB962C8B-B14F-4D97-AF65-F5344CB8AC3E}">
-        <p14:creationId xmlns:p14="http://schemas.microsoft.com/office/powerpoint/2010/main" val="1024086991"/>
+        <p14:creationId xmlns:p14="http://schemas.microsoft.com/office/powerpoint/2010/main" val="3615934738"/>
       </p:ext>
     </p:extLst>
   </p:cSld>
@@ -924,7 +740,6 @@
               <a:rPr lang="en-US" dirty="0"/>
               <a:t>Opening line: a payer turns written policy into claim rules. The policy changes. The rules do not. This is a working tool that finds the gap, built on real Medicare documents.</a:t>
             </a:r>
-            <a:endParaRPr lang="en-US" dirty="0"/>
           </a:p>
         </p:txBody>
       </p:sp>
@@ -1012,7 +827,6 @@
               <a:rPr lang="en-US" dirty="0"/>
               <a:t>Tier 2 is the rung I did not build, say so. The Day 1/Month 1/Year 1 strip is the answer to "how does this actually roll out" — lead with Day 1, it ships without changing how anyone works.</a:t>
             </a:r>
-            <a:endParaRPr lang="en-US" dirty="0"/>
           </a:p>
         </p:txBody>
       </p:sp>
@@ -1100,7 +914,6 @@
               <a:rPr lang="en-US" dirty="0"/>
               <a:t>If asked "why not RAG": say this line. Retrieval here is exact citation search, which is stronger and cheaper than semantic search for this problem.</a:t>
             </a:r>
-            <a:endParaRPr lang="en-US" dirty="0"/>
           </a:p>
         </p:txBody>
       </p:sp>
@@ -1188,7 +1001,6 @@
               <a:rPr lang="en-US" dirty="0"/>
               <a:t>This slide is the one that shows judgment, not just engineering. The state-law point in particular: the architecture was not built to satisfy a specific law, it turns out to already satisfy several.</a:t>
             </a:r>
-            <a:endParaRPr lang="en-US" dirty="0"/>
           </a:p>
         </p:txBody>
       </p:sp>
@@ -1276,7 +1088,6 @@
               <a:rPr lang="en-US" dirty="0"/>
               <a:t>Lead with recommendation one. It is the one that could ship next quarter without changing how anyone works.</a:t>
             </a:r>
-            <a:endParaRPr lang="en-US" dirty="0"/>
           </a:p>
         </p:txBody>
       </p:sp>
@@ -1364,7 +1175,6 @@
               <a:rPr lang="en-US" dirty="0"/>
               <a:t>Say this section confidently, not apologetically. It is a strength.</a:t>
             </a:r>
-            <a:endParaRPr lang="en-US" dirty="0"/>
           </a:p>
         </p:txBody>
       </p:sp>
@@ -1452,7 +1262,6 @@
               <a:rPr lang="en-US" dirty="0"/>
               <a:t>Close on the honest line. Do not oversell. Then stop talking.</a:t>
             </a:r>
-            <a:endParaRPr lang="en-US" dirty="0"/>
           </a:p>
         </p:txBody>
       </p:sp>
@@ -1540,7 +1349,6 @@
               <a:rPr lang="en-US" dirty="0"/>
               <a:t>The failure is not that the rule was written badly. It was correct in January. The failure is that nothing revisits it.</a:t>
             </a:r>
-            <a:endParaRPr lang="en-US" dirty="0"/>
           </a:p>
         </p:txBody>
       </p:sp>
@@ -1628,7 +1436,6 @@
               <a:rPr lang="en-US" dirty="0"/>
               <a:t>This slide exists so the audience does not think the problem is unsolved because nobody tried. It is unsolved because everyone stopped at the same place.</a:t>
             </a:r>
-            <a:endParaRPr lang="en-US" dirty="0"/>
           </a:p>
         </p:txBody>
       </p:sp>
@@ -1716,7 +1523,6 @@
               <a:rPr lang="en-US" dirty="0"/>
               <a:t>Stages 1 to 3 are the product a payer already has, in miniature. Stage 4 is the part nobody does.</a:t>
             </a:r>
-            <a:endParaRPr lang="en-US" dirty="0"/>
           </a:p>
         </p:txBody>
       </p:sp>
@@ -1804,7 +1610,6 @@
               <a:rPr lang="en-US" dirty="0"/>
               <a:t>Emphasise: the evaluation set came from CMS, not from me. That is the difference between a demo and a measurement.</a:t>
             </a:r>
-            <a:endParaRPr lang="en-US" dirty="0"/>
           </a:p>
         </p:txBody>
       </p:sp>
@@ -1892,7 +1697,6 @@
               <a:rPr lang="en-US" dirty="0"/>
               <a:t>These are the numbers to say out loud. Three of three, zero false alarms, and a negative control that cost nothing.</a:t>
             </a:r>
-            <a:endParaRPr lang="en-US" dirty="0"/>
           </a:p>
         </p:txBody>
       </p:sp>
@@ -1980,7 +1784,6 @@
               <a:rPr lang="en-US" dirty="0"/>
               <a:t>C-007 is the one to point at. Denied for testing once a day, under a requirement Medicare removed in July 2021.</a:t>
             </a:r>
-            <a:endParaRPr lang="en-US" dirty="0"/>
           </a:p>
         </p:txBody>
       </p:sp>
@@ -2068,7 +1871,6 @@
               <a:rPr lang="en-US" dirty="0"/>
               <a:t>This is the slide that separates the project from a chatbot demo. Say the appeal line out loud.</a:t>
             </a:r>
-            <a:endParaRPr lang="en-US" dirty="0"/>
           </a:p>
         </p:txBody>
       </p:sp>
@@ -2156,7 +1958,6 @@
               <a:rPr lang="en-US" dirty="0"/>
               <a:t>Do not skip this slide. Being able to name your own failures is the strongest thing in the submission.</a:t>
             </a:r>
-            <a:endParaRPr lang="en-US" dirty="0"/>
           </a:p>
         </p:txBody>
       </p:sp>
@@ -2229,6 +2030,11 @@
 <file path=ppt/slideMasters/slideMaster1.xml><?xml version="1.0" encoding="utf-8"?>
 <p:sldMaster xmlns:a="http://schemas.openxmlformats.org/drawingml/2006/main" xmlns:r="http://schemas.openxmlformats.org/officeDocument/2006/relationships" xmlns:p="http://schemas.openxmlformats.org/presentationml/2006/main">
   <p:cSld>
+    <p:bg>
+      <p:bgRef idx="1001">
+        <a:schemeClr val="bg1"/>
+      </p:bgRef>
+    </p:bg>
     <p:spTree>
       <p:nvGrpSpPr>
         <p:cNvPr id="1" name=""/>
@@ -2511,6 +2317,7 @@
         <a:solidFill>
           <a:srgbClr val="1C3141"/>
         </a:solidFill>
+        <a:effectLst/>
       </p:bgPr>
     </p:bg>
     <p:spTree>
@@ -2548,7 +2355,7 @@
           <a:bodyPr wrap="square" lIns="0" tIns="0" rIns="0" bIns="0" rtlCol="0" anchor="ctr"/>
           <a:lstStyle/>
           <a:p>
-            <a:pPr indent="0" marL="0">
+            <a:pPr marL="0" indent="0">
               <a:buNone/>
             </a:pPr>
             <a:r>
@@ -2587,7 +2394,7 @@
           <a:bodyPr wrap="square" lIns="0" tIns="0" rIns="0" bIns="0" rtlCol="0" anchor="ctr"/>
           <a:lstStyle/>
           <a:p>
-            <a:pPr indent="0" marL="0">
+            <a:pPr marL="0" indent="0">
               <a:buNone/>
             </a:pPr>
             <a:r>
@@ -2624,6 +2431,13 @@
           </a:solidFill>
           <a:ln/>
         </p:spPr>
+        <p:txBody>
+          <a:bodyPr/>
+          <a:lstStyle/>
+          <a:p>
+            <a:endParaRPr lang="en-US"/>
+          </a:p>
+        </p:txBody>
       </p:sp>
       <p:sp>
         <p:nvSpPr>
@@ -2646,7 +2460,7 @@
           <a:bodyPr wrap="square" lIns="0" tIns="0" rIns="0" bIns="0" rtlCol="0" anchor="ctr"/>
           <a:lstStyle/>
           <a:p>
-            <a:pPr indent="0" marL="0">
+            <a:pPr marL="0" indent="0">
               <a:buNone/>
             </a:pPr>
             <a:r>
@@ -2685,7 +2499,7 @@
           <a:bodyPr wrap="square" lIns="0" tIns="0" rIns="0" bIns="0" rtlCol="0" anchor="ctr"/>
           <a:lstStyle/>
           <a:p>
-            <a:pPr indent="0" marL="0">
+            <a:pPr marL="0" indent="0">
               <a:buNone/>
             </a:pPr>
             <a:r>
@@ -2724,7 +2538,7 @@
           <a:bodyPr wrap="square" lIns="0" tIns="0" rIns="0" bIns="0" rtlCol="0" anchor="ctr"/>
           <a:lstStyle/>
           <a:p>
-            <a:pPr indent="0" marL="0">
+            <a:pPr marL="0" indent="0">
               <a:buNone/>
             </a:pPr>
             <a:r>
@@ -2786,6 +2600,13 @@
           </a:solidFill>
           <a:ln/>
         </p:spPr>
+        <p:txBody>
+          <a:bodyPr/>
+          <a:lstStyle/>
+          <a:p>
+            <a:endParaRPr lang="en-US"/>
+          </a:p>
+        </p:txBody>
       </p:sp>
       <p:sp>
         <p:nvSpPr>
@@ -2808,11 +2629,11 @@
           <a:bodyPr wrap="square" lIns="0" tIns="0" rIns="0" bIns="0" rtlCol="0" anchor="ctr"/>
           <a:lstStyle/>
           <a:p>
-            <a:pPr indent="0" marL="0">
-              <a:buNone/>
-            </a:pPr>
-            <a:r>
-              <a:rPr lang="en-US" sz="1100" spc="60" kern="0" dirty="0">
+            <a:pPr marL="0" indent="0">
+              <a:buNone/>
+            </a:pPr>
+            <a:r>
+              <a:rPr lang="en-US" sz="1100" kern="0" spc="60" dirty="0">
                 <a:solidFill>
                   <a:srgbClr val="6B7A85"/>
                 </a:solidFill>
@@ -2847,7 +2668,7 @@
           <a:bodyPr wrap="square" lIns="0" tIns="0" rIns="0" bIns="0" rtlCol="0" anchor="t"/>
           <a:lstStyle/>
           <a:p>
-            <a:pPr indent="0" marL="0">
+            <a:pPr marL="0" indent="0">
               <a:buNone/>
             </a:pPr>
             <a:r>
@@ -2886,7 +2707,7 @@
           <a:bodyPr wrap="square" lIns="0" tIns="0" rIns="0" bIns="0" rtlCol="0" anchor="ctr"/>
           <a:lstStyle/>
           <a:p>
-            <a:pPr indent="0" marL="0">
+            <a:pPr marL="0" indent="0">
               <a:buNone/>
             </a:pPr>
             <a:r>
@@ -2930,6 +2751,13 @@
             <a:prstDash val="solid"/>
           </a:ln>
         </p:spPr>
+        <p:txBody>
+          <a:bodyPr/>
+          <a:lstStyle/>
+          <a:p>
+            <a:endParaRPr lang="en-US"/>
+          </a:p>
+        </p:txBody>
       </p:sp>
       <p:sp>
         <p:nvSpPr>
@@ -2952,7 +2780,7 @@
           <a:bodyPr wrap="square" lIns="0" tIns="0" rIns="0" bIns="0" rtlCol="0" anchor="ctr"/>
           <a:lstStyle/>
           <a:p>
-            <a:pPr indent="0" marL="0">
+            <a:pPr marL="0" indent="0">
               <a:buNone/>
             </a:pPr>
             <a:r>
@@ -2991,7 +2819,7 @@
           <a:bodyPr wrap="square" lIns="0" tIns="0" rIns="0" bIns="0" rtlCol="0" anchor="ctr"/>
           <a:lstStyle/>
           <a:p>
-            <a:pPr indent="0" marL="0">
+            <a:pPr marL="0" indent="0">
               <a:buNone/>
             </a:pPr>
             <a:r>
@@ -3030,7 +2858,7 @@
           <a:bodyPr wrap="square" lIns="0" tIns="0" rIns="0" bIns="0" rtlCol="0" anchor="ctr"/>
           <a:lstStyle/>
           <a:p>
-            <a:pPr indent="0" marL="0">
+            <a:pPr marL="0" indent="0">
               <a:buNone/>
             </a:pPr>
             <a:r>
@@ -3069,7 +2897,7 @@
           <a:bodyPr wrap="square" lIns="0" tIns="0" rIns="0" bIns="0" rtlCol="0" anchor="ctr"/>
           <a:lstStyle/>
           <a:p>
-            <a:pPr indent="0" marL="0">
+            <a:pPr marL="0" indent="0">
               <a:buNone/>
             </a:pPr>
             <a:r>
@@ -3113,6 +2941,13 @@
             <a:prstDash val="solid"/>
           </a:ln>
         </p:spPr>
+        <p:txBody>
+          <a:bodyPr/>
+          <a:lstStyle/>
+          <a:p>
+            <a:endParaRPr lang="en-US"/>
+          </a:p>
+        </p:txBody>
       </p:sp>
       <p:sp>
         <p:nvSpPr>
@@ -3135,7 +2970,7 @@
           <a:bodyPr wrap="square" lIns="0" tIns="0" rIns="0" bIns="0" rtlCol="0" anchor="ctr"/>
           <a:lstStyle/>
           <a:p>
-            <a:pPr indent="0" marL="0">
+            <a:pPr marL="0" indent="0">
               <a:buNone/>
             </a:pPr>
             <a:r>
@@ -3174,7 +3009,7 @@
           <a:bodyPr wrap="square" lIns="0" tIns="0" rIns="0" bIns="0" rtlCol="0" anchor="ctr"/>
           <a:lstStyle/>
           <a:p>
-            <a:pPr indent="0" marL="0">
+            <a:pPr marL="0" indent="0">
               <a:buNone/>
             </a:pPr>
             <a:r>
@@ -3213,7 +3048,7 @@
           <a:bodyPr wrap="square" lIns="0" tIns="0" rIns="0" bIns="0" rtlCol="0" anchor="ctr"/>
           <a:lstStyle/>
           <a:p>
-            <a:pPr indent="0" marL="0">
+            <a:pPr marL="0" indent="0">
               <a:buNone/>
             </a:pPr>
             <a:r>
@@ -3252,7 +3087,7 @@
           <a:bodyPr wrap="square" lIns="0" tIns="0" rIns="0" bIns="0" rtlCol="0" anchor="ctr"/>
           <a:lstStyle/>
           <a:p>
-            <a:pPr indent="0" marL="0">
+            <a:pPr marL="0" indent="0">
               <a:buNone/>
             </a:pPr>
             <a:r>
@@ -3296,6 +3131,13 @@
             <a:prstDash val="solid"/>
           </a:ln>
         </p:spPr>
+        <p:txBody>
+          <a:bodyPr/>
+          <a:lstStyle/>
+          <a:p>
+            <a:endParaRPr lang="en-US"/>
+          </a:p>
+        </p:txBody>
       </p:sp>
       <p:sp>
         <p:nvSpPr>
@@ -3318,7 +3160,7 @@
           <a:bodyPr wrap="square" lIns="0" tIns="0" rIns="0" bIns="0" rtlCol="0" anchor="ctr"/>
           <a:lstStyle/>
           <a:p>
-            <a:pPr indent="0" marL="0">
+            <a:pPr marL="0" indent="0">
               <a:buNone/>
             </a:pPr>
             <a:r>
@@ -3357,7 +3199,7 @@
           <a:bodyPr wrap="square" lIns="0" tIns="0" rIns="0" bIns="0" rtlCol="0" anchor="ctr"/>
           <a:lstStyle/>
           <a:p>
-            <a:pPr indent="0" marL="0">
+            <a:pPr marL="0" indent="0">
               <a:buNone/>
             </a:pPr>
             <a:r>
@@ -3396,7 +3238,7 @@
           <a:bodyPr wrap="square" lIns="0" tIns="0" rIns="0" bIns="0" rtlCol="0" anchor="ctr"/>
           <a:lstStyle/>
           <a:p>
-            <a:pPr indent="0" marL="0">
+            <a:pPr marL="0" indent="0">
               <a:buNone/>
             </a:pPr>
             <a:r>
@@ -3435,7 +3277,7 @@
           <a:bodyPr wrap="square" lIns="0" tIns="0" rIns="0" bIns="0" rtlCol="0" anchor="ctr"/>
           <a:lstStyle/>
           <a:p>
-            <a:pPr indent="0" marL="0">
+            <a:pPr marL="0" indent="0">
               <a:buNone/>
             </a:pPr>
             <a:r>
@@ -3479,6 +3321,13 @@
             <a:prstDash val="solid"/>
           </a:ln>
         </p:spPr>
+        <p:txBody>
+          <a:bodyPr/>
+          <a:lstStyle/>
+          <a:p>
+            <a:endParaRPr lang="en-US"/>
+          </a:p>
+        </p:txBody>
       </p:sp>
       <p:sp>
         <p:nvSpPr>
@@ -3501,7 +3350,7 @@
           <a:bodyPr wrap="square" lIns="0" tIns="0" rIns="0" bIns="0" rtlCol="0" anchor="ctr"/>
           <a:lstStyle/>
           <a:p>
-            <a:pPr indent="0" marL="0">
+            <a:pPr marL="0" indent="0">
               <a:buNone/>
             </a:pPr>
             <a:r>
@@ -3540,7 +3389,7 @@
           <a:bodyPr wrap="square" lIns="0" tIns="0" rIns="0" bIns="0" rtlCol="0" anchor="ctr"/>
           <a:lstStyle/>
           <a:p>
-            <a:pPr indent="0" marL="0">
+            <a:pPr marL="0" indent="0">
               <a:buNone/>
             </a:pPr>
             <a:r>
@@ -3579,7 +3428,7 @@
           <a:bodyPr wrap="square" lIns="0" tIns="0" rIns="0" bIns="0" rtlCol="0" anchor="ctr"/>
           <a:lstStyle/>
           <a:p>
-            <a:pPr indent="0" marL="0">
+            <a:pPr marL="0" indent="0">
               <a:buNone/>
             </a:pPr>
             <a:r>
@@ -3618,7 +3467,7 @@
           <a:bodyPr wrap="square" lIns="0" tIns="0" rIns="0" bIns="0" rtlCol="0" anchor="ctr"/>
           <a:lstStyle/>
           <a:p>
-            <a:pPr indent="0" marL="0">
+            <a:pPr marL="0" indent="0">
               <a:buNone/>
             </a:pPr>
             <a:r>
@@ -3657,7 +3506,7 @@
           <a:bodyPr wrap="square" lIns="0" tIns="0" rIns="0" bIns="0" rtlCol="0" anchor="ctr"/>
           <a:lstStyle/>
           <a:p>
-            <a:pPr indent="0" marL="0">
+            <a:pPr marL="0" indent="0">
               <a:buNone/>
             </a:pPr>
             <a:r>
@@ -3696,11 +3545,11 @@
           <a:bodyPr wrap="square" lIns="0" tIns="0" rIns="0" bIns="0" rtlCol="0" anchor="ctr"/>
           <a:lstStyle/>
           <a:p>
-            <a:pPr indent="0" marL="0">
-              <a:buNone/>
-            </a:pPr>
-            <a:r>
-              <a:rPr lang="en-US" sz="1100" b="1" spc="60" kern="0" dirty="0">
+            <a:pPr marL="0" indent="0">
+              <a:buNone/>
+            </a:pPr>
+            <a:r>
+              <a:rPr lang="en-US" sz="1100" b="1" kern="0" spc="60" dirty="0">
                 <a:solidFill>
                   <a:srgbClr val="6B7A85"/>
                 </a:solidFill>
@@ -3740,6 +3589,13 @@
             <a:prstDash val="solid"/>
           </a:ln>
         </p:spPr>
+        <p:txBody>
+          <a:bodyPr/>
+          <a:lstStyle/>
+          <a:p>
+            <a:endParaRPr lang="en-US"/>
+          </a:p>
+        </p:txBody>
       </p:sp>
       <p:sp>
         <p:nvSpPr>
@@ -3762,7 +3618,7 @@
           <a:bodyPr wrap="square" lIns="0" tIns="0" rIns="0" bIns="0" rtlCol="0" anchor="ctr"/>
           <a:lstStyle/>
           <a:p>
-            <a:pPr indent="0" marL="0">
+            <a:pPr marL="0" indent="0">
               <a:buNone/>
             </a:pPr>
             <a:r>
@@ -3801,7 +3657,7 @@
           <a:bodyPr wrap="square" lIns="0" tIns="0" rIns="0" bIns="0" rtlCol="0" anchor="ctr"/>
           <a:lstStyle/>
           <a:p>
-            <a:pPr indent="0" marL="0">
+            <a:pPr marL="0" indent="0">
               <a:buNone/>
             </a:pPr>
             <a:r>
@@ -3840,7 +3696,7 @@
           <a:bodyPr wrap="square" lIns="0" tIns="0" rIns="0" bIns="0" rtlCol="0" anchor="ctr"/>
           <a:lstStyle/>
           <a:p>
-            <a:pPr indent="0" marL="0">
+            <a:pPr marL="0" indent="0">
               <a:buNone/>
             </a:pPr>
             <a:r>
@@ -3884,6 +3740,13 @@
             <a:prstDash val="solid"/>
           </a:ln>
         </p:spPr>
+        <p:txBody>
+          <a:bodyPr/>
+          <a:lstStyle/>
+          <a:p>
+            <a:endParaRPr lang="en-US"/>
+          </a:p>
+        </p:txBody>
       </p:sp>
       <p:sp>
         <p:nvSpPr>
@@ -3906,7 +3769,7 @@
           <a:bodyPr wrap="square" lIns="0" tIns="0" rIns="0" bIns="0" rtlCol="0" anchor="ctr"/>
           <a:lstStyle/>
           <a:p>
-            <a:pPr indent="0" marL="0">
+            <a:pPr marL="0" indent="0">
               <a:buNone/>
             </a:pPr>
             <a:r>
@@ -3945,7 +3808,7 @@
           <a:bodyPr wrap="square" lIns="0" tIns="0" rIns="0" bIns="0" rtlCol="0" anchor="ctr"/>
           <a:lstStyle/>
           <a:p>
-            <a:pPr indent="0" marL="0">
+            <a:pPr marL="0" indent="0">
               <a:buNone/>
             </a:pPr>
             <a:r>
@@ -3984,7 +3847,7 @@
           <a:bodyPr wrap="square" lIns="0" tIns="0" rIns="0" bIns="0" rtlCol="0" anchor="ctr"/>
           <a:lstStyle/>
           <a:p>
-            <a:pPr indent="0" marL="0">
+            <a:pPr marL="0" indent="0">
               <a:buNone/>
             </a:pPr>
             <a:r>
@@ -4028,6 +3891,13 @@
             <a:prstDash val="solid"/>
           </a:ln>
         </p:spPr>
+        <p:txBody>
+          <a:bodyPr/>
+          <a:lstStyle/>
+          <a:p>
+            <a:endParaRPr lang="en-US"/>
+          </a:p>
+        </p:txBody>
       </p:sp>
       <p:sp>
         <p:nvSpPr>
@@ -4050,7 +3920,7 @@
           <a:bodyPr wrap="square" lIns="0" tIns="0" rIns="0" bIns="0" rtlCol="0" anchor="ctr"/>
           <a:lstStyle/>
           <a:p>
-            <a:pPr indent="0" marL="0">
+            <a:pPr marL="0" indent="0">
               <a:buNone/>
             </a:pPr>
             <a:r>
@@ -4089,7 +3959,7 @@
           <a:bodyPr wrap="square" lIns="0" tIns="0" rIns="0" bIns="0" rtlCol="0" anchor="ctr"/>
           <a:lstStyle/>
           <a:p>
-            <a:pPr indent="0" marL="0">
+            <a:pPr marL="0" indent="0">
               <a:buNone/>
             </a:pPr>
             <a:r>
@@ -4128,7 +3998,7 @@
           <a:bodyPr wrap="square" lIns="0" tIns="0" rIns="0" bIns="0" rtlCol="0" anchor="ctr"/>
           <a:lstStyle/>
           <a:p>
-            <a:pPr indent="0" marL="0">
+            <a:pPr marL="0" indent="0">
               <a:buNone/>
             </a:pPr>
             <a:r>
@@ -4190,6 +4060,13 @@
           </a:solidFill>
           <a:ln/>
         </p:spPr>
+        <p:txBody>
+          <a:bodyPr/>
+          <a:lstStyle/>
+          <a:p>
+            <a:endParaRPr lang="en-US"/>
+          </a:p>
+        </p:txBody>
       </p:sp>
       <p:sp>
         <p:nvSpPr>
@@ -4212,11 +4089,11 @@
           <a:bodyPr wrap="square" lIns="0" tIns="0" rIns="0" bIns="0" rtlCol="0" anchor="ctr"/>
           <a:lstStyle/>
           <a:p>
-            <a:pPr indent="0" marL="0">
-              <a:buNone/>
-            </a:pPr>
-            <a:r>
-              <a:rPr lang="en-US" sz="1100" spc="60" kern="0" dirty="0">
+            <a:pPr marL="0" indent="0">
+              <a:buNone/>
+            </a:pPr>
+            <a:r>
+              <a:rPr lang="en-US" sz="1100" kern="0" spc="60" dirty="0">
                 <a:solidFill>
                   <a:srgbClr val="6B7A85"/>
                 </a:solidFill>
@@ -4251,7 +4128,7 @@
           <a:bodyPr wrap="square" lIns="0" tIns="0" rIns="0" bIns="0" rtlCol="0" anchor="t"/>
           <a:lstStyle/>
           <a:p>
-            <a:pPr indent="0" marL="0">
+            <a:pPr marL="0" indent="0">
               <a:buNone/>
             </a:pPr>
             <a:r>
@@ -4295,6 +4172,13 @@
             <a:prstDash val="solid"/>
           </a:ln>
         </p:spPr>
+        <p:txBody>
+          <a:bodyPr/>
+          <a:lstStyle/>
+          <a:p>
+            <a:endParaRPr lang="en-US"/>
+          </a:p>
+        </p:txBody>
       </p:sp>
       <p:sp>
         <p:nvSpPr>
@@ -4315,6 +4199,13 @@
           </a:solidFill>
           <a:ln/>
         </p:spPr>
+        <p:txBody>
+          <a:bodyPr/>
+          <a:lstStyle/>
+          <a:p>
+            <a:endParaRPr lang="en-US"/>
+          </a:p>
+        </p:txBody>
       </p:sp>
       <p:sp>
         <p:nvSpPr>
@@ -4337,11 +4228,11 @@
           <a:bodyPr wrap="square" lIns="0" tIns="0" rIns="0" bIns="0" rtlCol="0" anchor="ctr"/>
           <a:lstStyle/>
           <a:p>
-            <a:pPr indent="0" marL="0">
-              <a:buNone/>
-            </a:pPr>
-            <a:r>
-              <a:rPr lang="en-US" sz="1050" b="1" spc="60" kern="0" dirty="0">
+            <a:pPr marL="0" indent="0">
+              <a:buNone/>
+            </a:pPr>
+            <a:r>
+              <a:rPr lang="en-US" sz="1050" b="1" kern="0" spc="60" dirty="0">
                 <a:solidFill>
                   <a:srgbClr val="2A4759"/>
                 </a:solidFill>
@@ -4376,7 +4267,7 @@
           <a:bodyPr wrap="square" lIns="0" tIns="0" rIns="0" bIns="0" rtlCol="0" anchor="ctr"/>
           <a:lstStyle/>
           <a:p>
-            <a:pPr indent="0" marL="0">
+            <a:pPr marL="0" indent="0">
               <a:buNone/>
             </a:pPr>
             <a:r>
@@ -4415,7 +4306,7 @@
           <a:bodyPr wrap="square" lIns="0" tIns="0" rIns="0" bIns="0" rtlCol="0" anchor="ctr"/>
           <a:lstStyle/>
           <a:p>
-            <a:pPr indent="0" marL="0">
+            <a:pPr marL="0" indent="0">
               <a:buNone/>
             </a:pPr>
             <a:r>
@@ -4454,7 +4345,7 @@
           <a:bodyPr wrap="square" lIns="0" tIns="0" rIns="0" bIns="0" rtlCol="0" anchor="ctr"/>
           <a:lstStyle/>
           <a:p>
-            <a:pPr indent="0" marL="0">
+            <a:pPr marL="0" indent="0">
               <a:buNone/>
             </a:pPr>
             <a:r>
@@ -4493,7 +4384,7 @@
           <a:bodyPr wrap="square" lIns="0" tIns="0" rIns="0" bIns="0" rtlCol="0" anchor="ctr"/>
           <a:lstStyle/>
           <a:p>
-            <a:pPr indent="0" marL="0">
+            <a:pPr marL="0" indent="0">
               <a:buNone/>
             </a:pPr>
             <a:r>
@@ -4537,6 +4428,13 @@
             <a:prstDash val="solid"/>
           </a:ln>
         </p:spPr>
+        <p:txBody>
+          <a:bodyPr/>
+          <a:lstStyle/>
+          <a:p>
+            <a:endParaRPr lang="en-US"/>
+          </a:p>
+        </p:txBody>
       </p:sp>
       <p:sp>
         <p:nvSpPr>
@@ -4557,6 +4455,13 @@
           </a:solidFill>
           <a:ln/>
         </p:spPr>
+        <p:txBody>
+          <a:bodyPr/>
+          <a:lstStyle/>
+          <a:p>
+            <a:endParaRPr lang="en-US"/>
+          </a:p>
+        </p:txBody>
       </p:sp>
       <p:sp>
         <p:nvSpPr>
@@ -4579,11 +4484,11 @@
           <a:bodyPr wrap="square" lIns="0" tIns="0" rIns="0" bIns="0" rtlCol="0" anchor="ctr"/>
           <a:lstStyle/>
           <a:p>
-            <a:pPr indent="0" marL="0">
-              <a:buNone/>
-            </a:pPr>
-            <a:r>
-              <a:rPr lang="en-US" sz="1050" b="1" spc="60" kern="0" dirty="0">
+            <a:pPr marL="0" indent="0">
+              <a:buNone/>
+            </a:pPr>
+            <a:r>
+              <a:rPr lang="en-US" sz="1050" b="1" kern="0" spc="60" dirty="0">
                 <a:solidFill>
                   <a:srgbClr val="2A4759"/>
                 </a:solidFill>
@@ -4618,7 +4523,7 @@
           <a:bodyPr wrap="square" lIns="0" tIns="0" rIns="0" bIns="0" rtlCol="0" anchor="ctr"/>
           <a:lstStyle/>
           <a:p>
-            <a:pPr indent="0" marL="0">
+            <a:pPr marL="0" indent="0">
               <a:buNone/>
             </a:pPr>
             <a:r>
@@ -4657,7 +4562,7 @@
           <a:bodyPr wrap="square" lIns="0" tIns="0" rIns="0" bIns="0" rtlCol="0" anchor="ctr"/>
           <a:lstStyle/>
           <a:p>
-            <a:pPr indent="0" marL="0">
+            <a:pPr marL="0" indent="0">
               <a:buNone/>
             </a:pPr>
             <a:r>
@@ -4696,7 +4601,7 @@
           <a:bodyPr wrap="square" lIns="0" tIns="0" rIns="0" bIns="0" rtlCol="0" anchor="ctr"/>
           <a:lstStyle/>
           <a:p>
-            <a:pPr indent="0" marL="0">
+            <a:pPr marL="0" indent="0">
               <a:buNone/>
             </a:pPr>
             <a:r>
@@ -4735,7 +4640,7 @@
           <a:bodyPr wrap="square" lIns="0" tIns="0" rIns="0" bIns="0" rtlCol="0" anchor="ctr"/>
           <a:lstStyle/>
           <a:p>
-            <a:pPr indent="0" marL="0">
+            <a:pPr marL="0" indent="0">
               <a:buNone/>
             </a:pPr>
             <a:r>
@@ -4779,6 +4684,13 @@
             <a:prstDash val="solid"/>
           </a:ln>
         </p:spPr>
+        <p:txBody>
+          <a:bodyPr/>
+          <a:lstStyle/>
+          <a:p>
+            <a:endParaRPr lang="en-US"/>
+          </a:p>
+        </p:txBody>
       </p:sp>
       <p:sp>
         <p:nvSpPr>
@@ -4799,6 +4711,13 @@
           </a:solidFill>
           <a:ln/>
         </p:spPr>
+        <p:txBody>
+          <a:bodyPr/>
+          <a:lstStyle/>
+          <a:p>
+            <a:endParaRPr lang="en-US"/>
+          </a:p>
+        </p:txBody>
       </p:sp>
       <p:sp>
         <p:nvSpPr>
@@ -4821,11 +4740,11 @@
           <a:bodyPr wrap="square" lIns="0" tIns="0" rIns="0" bIns="0" rtlCol="0" anchor="ctr"/>
           <a:lstStyle/>
           <a:p>
-            <a:pPr indent="0" marL="0">
-              <a:buNone/>
-            </a:pPr>
-            <a:r>
-              <a:rPr lang="en-US" sz="1050" b="1" spc="60" kern="0" dirty="0">
+            <a:pPr marL="0" indent="0">
+              <a:buNone/>
+            </a:pPr>
+            <a:r>
+              <a:rPr lang="en-US" sz="1050" b="1" kern="0" spc="60" dirty="0">
                 <a:solidFill>
                   <a:srgbClr val="9A7420"/>
                 </a:solidFill>
@@ -4860,7 +4779,7 @@
           <a:bodyPr wrap="square" lIns="0" tIns="0" rIns="0" bIns="0" rtlCol="0" anchor="ctr"/>
           <a:lstStyle/>
           <a:p>
-            <a:pPr indent="0" marL="0">
+            <a:pPr marL="0" indent="0">
               <a:buNone/>
             </a:pPr>
             <a:r>
@@ -4899,7 +4818,7 @@
           <a:bodyPr wrap="square" lIns="0" tIns="0" rIns="0" bIns="0" rtlCol="0" anchor="ctr"/>
           <a:lstStyle/>
           <a:p>
-            <a:pPr indent="0" marL="0">
+            <a:pPr marL="0" indent="0">
               <a:buNone/>
             </a:pPr>
             <a:r>
@@ -4938,7 +4857,7 @@
           <a:bodyPr wrap="square" lIns="0" tIns="0" rIns="0" bIns="0" rtlCol="0" anchor="ctr"/>
           <a:lstStyle/>
           <a:p>
-            <a:pPr indent="0" marL="0">
+            <a:pPr marL="0" indent="0">
               <a:buNone/>
             </a:pPr>
             <a:r>
@@ -4977,7 +4896,7 @@
           <a:bodyPr wrap="square" lIns="0" tIns="0" rIns="0" bIns="0" rtlCol="0" anchor="ctr"/>
           <a:lstStyle/>
           <a:p>
-            <a:pPr indent="0" marL="0">
+            <a:pPr marL="0" indent="0">
               <a:buNone/>
             </a:pPr>
             <a:r>
@@ -5021,6 +4940,13 @@
             <a:prstDash val="solid"/>
           </a:ln>
         </p:spPr>
+        <p:txBody>
+          <a:bodyPr/>
+          <a:lstStyle/>
+          <a:p>
+            <a:endParaRPr lang="en-US"/>
+          </a:p>
+        </p:txBody>
       </p:sp>
       <p:sp>
         <p:nvSpPr>
@@ -5041,6 +4967,13 @@
           </a:solidFill>
           <a:ln/>
         </p:spPr>
+        <p:txBody>
+          <a:bodyPr/>
+          <a:lstStyle/>
+          <a:p>
+            <a:endParaRPr lang="en-US"/>
+          </a:p>
+        </p:txBody>
       </p:sp>
       <p:sp>
         <p:nvSpPr>
@@ -5063,11 +4996,11 @@
           <a:bodyPr wrap="square" lIns="0" tIns="0" rIns="0" bIns="0" rtlCol="0" anchor="ctr"/>
           <a:lstStyle/>
           <a:p>
-            <a:pPr indent="0" marL="0">
-              <a:buNone/>
-            </a:pPr>
-            <a:r>
-              <a:rPr lang="en-US" sz="1050" b="1" spc="60" kern="0" dirty="0">
+            <a:pPr marL="0" indent="0">
+              <a:buNone/>
+            </a:pPr>
+            <a:r>
+              <a:rPr lang="en-US" sz="1050" b="1" kern="0" spc="60" dirty="0">
                 <a:solidFill>
                   <a:srgbClr val="3E7A5E"/>
                 </a:solidFill>
@@ -5102,7 +5035,7 @@
           <a:bodyPr wrap="square" lIns="0" tIns="0" rIns="0" bIns="0" rtlCol="0" anchor="ctr"/>
           <a:lstStyle/>
           <a:p>
-            <a:pPr indent="0" marL="0">
+            <a:pPr marL="0" indent="0">
               <a:buNone/>
             </a:pPr>
             <a:r>
@@ -5141,7 +5074,7 @@
           <a:bodyPr wrap="square" lIns="0" tIns="0" rIns="0" bIns="0" rtlCol="0" anchor="ctr"/>
           <a:lstStyle/>
           <a:p>
-            <a:pPr indent="0" marL="0">
+            <a:pPr marL="0" indent="0">
               <a:buNone/>
             </a:pPr>
             <a:r>
@@ -5180,7 +5113,7 @@
           <a:bodyPr wrap="square" lIns="0" tIns="0" rIns="0" bIns="0" rtlCol="0" anchor="ctr"/>
           <a:lstStyle/>
           <a:p>
-            <a:pPr indent="0" marL="0">
+            <a:pPr marL="0" indent="0">
               <a:buNone/>
             </a:pPr>
             <a:r>
@@ -5219,7 +5152,7 @@
           <a:bodyPr wrap="square" lIns="0" tIns="0" rIns="0" bIns="0" rtlCol="0" anchor="ctr"/>
           <a:lstStyle/>
           <a:p>
-            <a:pPr indent="0" marL="0">
+            <a:pPr marL="0" indent="0">
               <a:buNone/>
             </a:pPr>
             <a:r>
@@ -5263,6 +5196,13 @@
             <a:prstDash val="solid"/>
           </a:ln>
         </p:spPr>
+        <p:txBody>
+          <a:bodyPr/>
+          <a:lstStyle/>
+          <a:p>
+            <a:endParaRPr lang="en-US"/>
+          </a:p>
+        </p:txBody>
       </p:sp>
       <p:sp>
         <p:nvSpPr>
@@ -5283,6 +5223,13 @@
           </a:solidFill>
           <a:ln/>
         </p:spPr>
+        <p:txBody>
+          <a:bodyPr/>
+          <a:lstStyle/>
+          <a:p>
+            <a:endParaRPr lang="en-US"/>
+          </a:p>
+        </p:txBody>
       </p:sp>
       <p:sp>
         <p:nvSpPr>
@@ -5305,11 +5252,11 @@
           <a:bodyPr wrap="square" lIns="0" tIns="0" rIns="0" bIns="0" rtlCol="0" anchor="ctr"/>
           <a:lstStyle/>
           <a:p>
-            <a:pPr indent="0" marL="0">
-              <a:buNone/>
-            </a:pPr>
-            <a:r>
-              <a:rPr lang="en-US" sz="1050" b="1" spc="60" kern="0" dirty="0">
+            <a:pPr marL="0" indent="0">
+              <a:buNone/>
+            </a:pPr>
+            <a:r>
+              <a:rPr lang="en-US" sz="1050" b="1" kern="0" spc="60" dirty="0">
                 <a:solidFill>
                   <a:srgbClr val="2A4759"/>
                 </a:solidFill>
@@ -5344,7 +5291,7 @@
           <a:bodyPr wrap="square" lIns="0" tIns="0" rIns="0" bIns="0" rtlCol="0" anchor="ctr"/>
           <a:lstStyle/>
           <a:p>
-            <a:pPr indent="0" marL="0">
+            <a:pPr marL="0" indent="0">
               <a:buNone/>
             </a:pPr>
             <a:r>
@@ -5383,7 +5330,7 @@
           <a:bodyPr wrap="square" lIns="0" tIns="0" rIns="0" bIns="0" rtlCol="0" anchor="ctr"/>
           <a:lstStyle/>
           <a:p>
-            <a:pPr indent="0" marL="0">
+            <a:pPr marL="0" indent="0">
               <a:buNone/>
             </a:pPr>
             <a:r>
@@ -5422,7 +5369,7 @@
           <a:bodyPr wrap="square" lIns="0" tIns="0" rIns="0" bIns="0" rtlCol="0" anchor="ctr"/>
           <a:lstStyle/>
           <a:p>
-            <a:pPr indent="0" marL="0">
+            <a:pPr marL="0" indent="0">
               <a:buNone/>
             </a:pPr>
             <a:r>
@@ -5461,7 +5408,7 @@
           <a:bodyPr wrap="square" lIns="0" tIns="0" rIns="0" bIns="0" rtlCol="0" anchor="ctr"/>
           <a:lstStyle/>
           <a:p>
-            <a:pPr indent="0" marL="0">
+            <a:pPr marL="0" indent="0">
               <a:buNone/>
             </a:pPr>
             <a:r>
@@ -5505,6 +5452,13 @@
             <a:prstDash val="solid"/>
           </a:ln>
         </p:spPr>
+        <p:txBody>
+          <a:bodyPr/>
+          <a:lstStyle/>
+          <a:p>
+            <a:endParaRPr lang="en-US"/>
+          </a:p>
+        </p:txBody>
       </p:sp>
       <p:sp>
         <p:nvSpPr>
@@ -5525,6 +5479,13 @@
           </a:solidFill>
           <a:ln/>
         </p:spPr>
+        <p:txBody>
+          <a:bodyPr/>
+          <a:lstStyle/>
+          <a:p>
+            <a:endParaRPr lang="en-US"/>
+          </a:p>
+        </p:txBody>
       </p:sp>
       <p:sp>
         <p:nvSpPr>
@@ -5547,11 +5508,11 @@
           <a:bodyPr wrap="square" lIns="0" tIns="0" rIns="0" bIns="0" rtlCol="0" anchor="ctr"/>
           <a:lstStyle/>
           <a:p>
-            <a:pPr indent="0" marL="0">
-              <a:buNone/>
-            </a:pPr>
-            <a:r>
-              <a:rPr lang="en-US" sz="1050" b="1" spc="60" kern="0" dirty="0">
+            <a:pPr marL="0" indent="0">
+              <a:buNone/>
+            </a:pPr>
+            <a:r>
+              <a:rPr lang="en-US" sz="1050" b="1" kern="0" spc="60" dirty="0">
                 <a:solidFill>
                   <a:srgbClr val="2A4759"/>
                 </a:solidFill>
@@ -5586,7 +5547,7 @@
           <a:bodyPr wrap="square" lIns="0" tIns="0" rIns="0" bIns="0" rtlCol="0" anchor="ctr"/>
           <a:lstStyle/>
           <a:p>
-            <a:pPr indent="0" marL="0">
+            <a:pPr marL="0" indent="0">
               <a:buNone/>
             </a:pPr>
             <a:r>
@@ -5625,7 +5586,7 @@
           <a:bodyPr wrap="square" lIns="0" tIns="0" rIns="0" bIns="0" rtlCol="0" anchor="ctr"/>
           <a:lstStyle/>
           <a:p>
-            <a:pPr indent="0" marL="0">
+            <a:pPr marL="0" indent="0">
               <a:buNone/>
             </a:pPr>
             <a:r>
@@ -5664,7 +5625,7 @@
           <a:bodyPr wrap="square" lIns="0" tIns="0" rIns="0" bIns="0" rtlCol="0" anchor="ctr"/>
           <a:lstStyle/>
           <a:p>
-            <a:pPr indent="0" marL="0">
+            <a:pPr marL="0" indent="0">
               <a:buNone/>
             </a:pPr>
             <a:r>
@@ -5703,7 +5664,7 @@
           <a:bodyPr wrap="square" lIns="0" tIns="0" rIns="0" bIns="0" rtlCol="0" anchor="ctr"/>
           <a:lstStyle/>
           <a:p>
-            <a:pPr indent="0" marL="0">
+            <a:pPr marL="0" indent="0">
               <a:buNone/>
             </a:pPr>
             <a:r>
@@ -5742,7 +5703,7 @@
           <a:bodyPr wrap="square" lIns="0" tIns="0" rIns="0" bIns="0" rtlCol="0" anchor="ctr"/>
           <a:lstStyle/>
           <a:p>
-            <a:pPr indent="0" marL="0">
+            <a:pPr marL="0" indent="0">
               <a:buNone/>
             </a:pPr>
             <a:r>
@@ -5804,6 +5765,13 @@
           </a:solidFill>
           <a:ln/>
         </p:spPr>
+        <p:txBody>
+          <a:bodyPr/>
+          <a:lstStyle/>
+          <a:p>
+            <a:endParaRPr lang="en-US"/>
+          </a:p>
+        </p:txBody>
       </p:sp>
       <p:sp>
         <p:nvSpPr>
@@ -5826,11 +5794,11 @@
           <a:bodyPr wrap="square" lIns="0" tIns="0" rIns="0" bIns="0" rtlCol="0" anchor="ctr"/>
           <a:lstStyle/>
           <a:p>
-            <a:pPr indent="0" marL="0">
-              <a:buNone/>
-            </a:pPr>
-            <a:r>
-              <a:rPr lang="en-US" sz="1100" spc="60" kern="0" dirty="0">
+            <a:pPr marL="0" indent="0">
+              <a:buNone/>
+            </a:pPr>
+            <a:r>
+              <a:rPr lang="en-US" sz="1100" kern="0" spc="60" dirty="0">
                 <a:solidFill>
                   <a:srgbClr val="6B7A85"/>
                 </a:solidFill>
@@ -5865,7 +5833,7 @@
           <a:bodyPr wrap="square" lIns="0" tIns="0" rIns="0" bIns="0" rtlCol="0" anchor="t"/>
           <a:lstStyle/>
           <a:p>
-            <a:pPr indent="0" marL="0">
+            <a:pPr marL="0" indent="0">
               <a:buNone/>
             </a:pPr>
             <a:r>
@@ -5909,6 +5877,13 @@
             <a:prstDash val="solid"/>
           </a:ln>
         </p:spPr>
+        <p:txBody>
+          <a:bodyPr/>
+          <a:lstStyle/>
+          <a:p>
+            <a:endParaRPr lang="en-US"/>
+          </a:p>
+        </p:txBody>
       </p:sp>
       <p:sp>
         <p:nvSpPr>
@@ -5931,7 +5906,7 @@
           <a:bodyPr wrap="square" lIns="0" tIns="0" rIns="0" bIns="0" rtlCol="0" anchor="ctr"/>
           <a:lstStyle/>
           <a:p>
-            <a:pPr indent="0" marL="0">
+            <a:pPr marL="0" indent="0">
               <a:buNone/>
             </a:pPr>
             <a:r>
@@ -5970,7 +5945,7 @@
           <a:bodyPr wrap="square" lIns="0" tIns="0" rIns="0" bIns="0" rtlCol="0" anchor="ctr"/>
           <a:lstStyle/>
           <a:p>
-            <a:pPr indent="0" marL="0">
+            <a:pPr marL="0" indent="0">
               <a:buNone/>
             </a:pPr>
             <a:r>
@@ -6014,6 +5989,13 @@
             <a:prstDash val="solid"/>
           </a:ln>
         </p:spPr>
+        <p:txBody>
+          <a:bodyPr/>
+          <a:lstStyle/>
+          <a:p>
+            <a:endParaRPr lang="en-US"/>
+          </a:p>
+        </p:txBody>
       </p:sp>
       <p:sp>
         <p:nvSpPr>
@@ -6036,7 +6018,7 @@
           <a:bodyPr wrap="square" lIns="0" tIns="0" rIns="0" bIns="0" rtlCol="0" anchor="ctr"/>
           <a:lstStyle/>
           <a:p>
-            <a:pPr indent="0" marL="0">
+            <a:pPr marL="0" indent="0">
               <a:buNone/>
             </a:pPr>
             <a:r>
@@ -6075,7 +6057,7 @@
           <a:bodyPr wrap="square" lIns="0" tIns="0" rIns="0" bIns="0" rtlCol="0" anchor="ctr"/>
           <a:lstStyle/>
           <a:p>
-            <a:pPr indent="0" marL="0">
+            <a:pPr marL="0" indent="0">
               <a:buNone/>
             </a:pPr>
             <a:r>
@@ -6119,6 +6101,13 @@
             <a:prstDash val="solid"/>
           </a:ln>
         </p:spPr>
+        <p:txBody>
+          <a:bodyPr/>
+          <a:lstStyle/>
+          <a:p>
+            <a:endParaRPr lang="en-US"/>
+          </a:p>
+        </p:txBody>
       </p:sp>
       <p:sp>
         <p:nvSpPr>
@@ -6141,7 +6130,7 @@
           <a:bodyPr wrap="square" lIns="0" tIns="0" rIns="0" bIns="0" rtlCol="0" anchor="ctr"/>
           <a:lstStyle/>
           <a:p>
-            <a:pPr indent="0" marL="0">
+            <a:pPr marL="0" indent="0">
               <a:buNone/>
             </a:pPr>
             <a:r>
@@ -6180,7 +6169,7 @@
           <a:bodyPr wrap="square" lIns="0" tIns="0" rIns="0" bIns="0" rtlCol="0" anchor="ctr"/>
           <a:lstStyle/>
           <a:p>
-            <a:pPr indent="0" marL="0">
+            <a:pPr marL="0" indent="0">
               <a:buNone/>
             </a:pPr>
             <a:r>
@@ -6224,6 +6213,13 @@
             <a:prstDash val="solid"/>
           </a:ln>
         </p:spPr>
+        <p:txBody>
+          <a:bodyPr/>
+          <a:lstStyle/>
+          <a:p>
+            <a:endParaRPr lang="en-US"/>
+          </a:p>
+        </p:txBody>
       </p:sp>
       <p:sp>
         <p:nvSpPr>
@@ -6246,7 +6242,7 @@
           <a:bodyPr wrap="square" lIns="0" tIns="0" rIns="0" bIns="0" rtlCol="0" anchor="ctr"/>
           <a:lstStyle/>
           <a:p>
-            <a:pPr indent="0" marL="0">
+            <a:pPr marL="0" indent="0">
               <a:buNone/>
             </a:pPr>
             <a:r>
@@ -6285,7 +6281,7 @@
           <a:bodyPr wrap="square" lIns="0" tIns="0" rIns="0" bIns="0" rtlCol="0" anchor="ctr"/>
           <a:lstStyle/>
           <a:p>
-            <a:pPr indent="0" marL="0">
+            <a:pPr marL="0" indent="0">
               <a:buNone/>
             </a:pPr>
             <a:r>
@@ -6324,7 +6320,7 @@
           <a:bodyPr wrap="square" lIns="0" tIns="0" rIns="0" bIns="0" rtlCol="0" anchor="ctr"/>
           <a:lstStyle/>
           <a:p>
-            <a:pPr indent="0" marL="0">
+            <a:pPr marL="0" indent="0">
               <a:buNone/>
             </a:pPr>
             <a:r>
@@ -6363,7 +6359,7 @@
           <a:bodyPr wrap="square" lIns="0" tIns="0" rIns="0" bIns="0" rtlCol="0" anchor="ctr"/>
           <a:lstStyle/>
           <a:p>
-            <a:pPr indent="0" marL="0">
+            <a:pPr marL="0" indent="0">
               <a:buNone/>
             </a:pPr>
             <a:r>
@@ -6425,6 +6421,13 @@
           </a:solidFill>
           <a:ln/>
         </p:spPr>
+        <p:txBody>
+          <a:bodyPr/>
+          <a:lstStyle/>
+          <a:p>
+            <a:endParaRPr lang="en-US"/>
+          </a:p>
+        </p:txBody>
       </p:sp>
       <p:sp>
         <p:nvSpPr>
@@ -6447,11 +6450,11 @@
           <a:bodyPr wrap="square" lIns="0" tIns="0" rIns="0" bIns="0" rtlCol="0" anchor="ctr"/>
           <a:lstStyle/>
           <a:p>
-            <a:pPr indent="0" marL="0">
-              <a:buNone/>
-            </a:pPr>
-            <a:r>
-              <a:rPr lang="en-US" sz="1100" spc="60" kern="0" dirty="0">
+            <a:pPr marL="0" indent="0">
+              <a:buNone/>
+            </a:pPr>
+            <a:r>
+              <a:rPr lang="en-US" sz="1100" kern="0" spc="60" dirty="0">
                 <a:solidFill>
                   <a:srgbClr val="6B7A85"/>
                 </a:solidFill>
@@ -6486,7 +6489,7 @@
           <a:bodyPr wrap="square" lIns="0" tIns="0" rIns="0" bIns="0" rtlCol="0" anchor="t"/>
           <a:lstStyle/>
           <a:p>
-            <a:pPr indent="0" marL="0">
+            <a:pPr marL="0" indent="0">
               <a:buNone/>
             </a:pPr>
             <a:r>
@@ -6525,7 +6528,7 @@
           <a:bodyPr wrap="square" lIns="0" tIns="0" rIns="0" bIns="0" rtlCol="0" anchor="ctr"/>
           <a:lstStyle/>
           <a:p>
-            <a:pPr indent="0" marL="0">
+            <a:pPr marL="0" indent="0">
               <a:buNone/>
             </a:pPr>
             <a:r>
@@ -6564,7 +6567,7 @@
           <a:bodyPr wrap="square" lIns="0" tIns="0" rIns="0" bIns="0" rtlCol="0" anchor="ctr"/>
           <a:lstStyle/>
           <a:p>
-            <a:pPr indent="0" marL="0">
+            <a:pPr marL="0" indent="0">
               <a:buNone/>
             </a:pPr>
             <a:r>
@@ -6603,7 +6606,7 @@
           <a:bodyPr wrap="square" lIns="0" tIns="0" rIns="0" bIns="0" rtlCol="0" anchor="ctr"/>
           <a:lstStyle/>
           <a:p>
-            <a:pPr indent="0" marL="0">
+            <a:pPr marL="0" indent="0">
               <a:buNone/>
             </a:pPr>
             <a:r>
@@ -6642,7 +6645,7 @@
           <a:bodyPr wrap="square" lIns="0" tIns="0" rIns="0" bIns="0" rtlCol="0" anchor="ctr"/>
           <a:lstStyle/>
           <a:p>
-            <a:pPr indent="0" marL="0">
+            <a:pPr marL="0" indent="0">
               <a:buNone/>
             </a:pPr>
             <a:r>
@@ -6681,7 +6684,7 @@
           <a:bodyPr wrap="square" lIns="0" tIns="0" rIns="0" bIns="0" rtlCol="0" anchor="ctr"/>
           <a:lstStyle/>
           <a:p>
-            <a:pPr indent="0" marL="0">
+            <a:pPr marL="0" indent="0">
               <a:buNone/>
             </a:pPr>
             <a:r>
@@ -6720,7 +6723,7 @@
           <a:bodyPr wrap="square" lIns="0" tIns="0" rIns="0" bIns="0" rtlCol="0" anchor="ctr"/>
           <a:lstStyle/>
           <a:p>
-            <a:pPr indent="0" marL="0">
+            <a:pPr marL="0" indent="0">
               <a:buNone/>
             </a:pPr>
             <a:r>
@@ -6759,7 +6762,7 @@
           <a:bodyPr wrap="square" lIns="0" tIns="0" rIns="0" bIns="0" rtlCol="0" anchor="ctr"/>
           <a:lstStyle/>
           <a:p>
-            <a:pPr indent="0" marL="0">
+            <a:pPr marL="0" indent="0">
               <a:buNone/>
             </a:pPr>
             <a:r>
@@ -6798,7 +6801,7 @@
           <a:bodyPr wrap="square" lIns="0" tIns="0" rIns="0" bIns="0" rtlCol="0" anchor="ctr"/>
           <a:lstStyle/>
           <a:p>
-            <a:pPr indent="0" marL="0">
+            <a:pPr marL="0" indent="0">
               <a:buNone/>
             </a:pPr>
             <a:r>
@@ -6837,7 +6840,7 @@
           <a:bodyPr wrap="square" lIns="0" tIns="0" rIns="0" bIns="0" rtlCol="0" anchor="ctr"/>
           <a:lstStyle/>
           <a:p>
-            <a:pPr indent="0" marL="0">
+            <a:pPr marL="0" indent="0">
               <a:buNone/>
             </a:pPr>
             <a:r>
@@ -6899,6 +6902,13 @@
           </a:solidFill>
           <a:ln/>
         </p:spPr>
+        <p:txBody>
+          <a:bodyPr/>
+          <a:lstStyle/>
+          <a:p>
+            <a:endParaRPr lang="en-US"/>
+          </a:p>
+        </p:txBody>
       </p:sp>
       <p:sp>
         <p:nvSpPr>
@@ -6921,11 +6931,11 @@
           <a:bodyPr wrap="square" lIns="0" tIns="0" rIns="0" bIns="0" rtlCol="0" anchor="ctr"/>
           <a:lstStyle/>
           <a:p>
-            <a:pPr indent="0" marL="0">
-              <a:buNone/>
-            </a:pPr>
-            <a:r>
-              <a:rPr lang="en-US" sz="1100" spc="60" kern="0" dirty="0">
+            <a:pPr marL="0" indent="0">
+              <a:buNone/>
+            </a:pPr>
+            <a:r>
+              <a:rPr lang="en-US" sz="1100" kern="0" spc="60" dirty="0">
                 <a:solidFill>
                   <a:srgbClr val="6B7A85"/>
                 </a:solidFill>
@@ -6960,7 +6970,7 @@
           <a:bodyPr wrap="square" lIns="0" tIns="0" rIns="0" bIns="0" rtlCol="0" anchor="t"/>
           <a:lstStyle/>
           <a:p>
-            <a:pPr indent="0" marL="0">
+            <a:pPr marL="0" indent="0">
               <a:buNone/>
             </a:pPr>
             <a:r>
@@ -6997,6 +7007,13 @@
           </a:solidFill>
           <a:ln/>
         </p:spPr>
+        <p:txBody>
+          <a:bodyPr/>
+          <a:lstStyle/>
+          <a:p>
+            <a:endParaRPr lang="en-US"/>
+          </a:p>
+        </p:txBody>
       </p:sp>
       <p:sp>
         <p:nvSpPr>
@@ -7019,7 +7036,7 @@
           <a:bodyPr wrap="square" lIns="0" tIns="0" rIns="0" bIns="0" rtlCol="0" anchor="ctr"/>
           <a:lstStyle/>
           <a:p>
-            <a:pPr indent="0" marL="0">
+            <a:pPr marL="0" indent="0">
               <a:buNone/>
             </a:pPr>
             <a:r>
@@ -7056,6 +7073,13 @@
           </a:solidFill>
           <a:ln/>
         </p:spPr>
+        <p:txBody>
+          <a:bodyPr/>
+          <a:lstStyle/>
+          <a:p>
+            <a:endParaRPr lang="en-US"/>
+          </a:p>
+        </p:txBody>
       </p:sp>
       <p:sp>
         <p:nvSpPr>
@@ -7078,7 +7102,7 @@
           <a:bodyPr wrap="square" lIns="0" tIns="0" rIns="0" bIns="0" rtlCol="0" anchor="ctr"/>
           <a:lstStyle/>
           <a:p>
-            <a:pPr indent="0" marL="0">
+            <a:pPr marL="0" indent="0">
               <a:buNone/>
             </a:pPr>
             <a:r>
@@ -7115,6 +7139,13 @@
           </a:solidFill>
           <a:ln/>
         </p:spPr>
+        <p:txBody>
+          <a:bodyPr/>
+          <a:lstStyle/>
+          <a:p>
+            <a:endParaRPr lang="en-US"/>
+          </a:p>
+        </p:txBody>
       </p:sp>
       <p:sp>
         <p:nvSpPr>
@@ -7137,7 +7168,7 @@
           <a:bodyPr wrap="square" lIns="0" tIns="0" rIns="0" bIns="0" rtlCol="0" anchor="ctr"/>
           <a:lstStyle/>
           <a:p>
-            <a:pPr indent="0" marL="0">
+            <a:pPr marL="0" indent="0">
               <a:buNone/>
             </a:pPr>
             <a:r>
@@ -7174,6 +7205,13 @@
           </a:solidFill>
           <a:ln/>
         </p:spPr>
+        <p:txBody>
+          <a:bodyPr/>
+          <a:lstStyle/>
+          <a:p>
+            <a:endParaRPr lang="en-US"/>
+          </a:p>
+        </p:txBody>
       </p:sp>
       <p:sp>
         <p:nvSpPr>
@@ -7196,7 +7234,7 @@
           <a:bodyPr wrap="square" lIns="0" tIns="0" rIns="0" bIns="0" rtlCol="0" anchor="ctr"/>
           <a:lstStyle/>
           <a:p>
-            <a:pPr indent="0" marL="0">
+            <a:pPr marL="0" indent="0">
               <a:buNone/>
             </a:pPr>
             <a:r>
@@ -7233,6 +7271,13 @@
           </a:solidFill>
           <a:ln/>
         </p:spPr>
+        <p:txBody>
+          <a:bodyPr/>
+          <a:lstStyle/>
+          <a:p>
+            <a:endParaRPr lang="en-US"/>
+          </a:p>
+        </p:txBody>
       </p:sp>
       <p:sp>
         <p:nvSpPr>
@@ -7255,7 +7300,7 @@
           <a:bodyPr wrap="square" lIns="0" tIns="0" rIns="0" bIns="0" rtlCol="0" anchor="ctr"/>
           <a:lstStyle/>
           <a:p>
-            <a:pPr indent="0" marL="0">
+            <a:pPr marL="0" indent="0">
               <a:buNone/>
             </a:pPr>
             <a:r>
@@ -7294,7 +7339,7 @@
           <a:bodyPr wrap="square" lIns="0" tIns="0" rIns="0" bIns="0" rtlCol="0" anchor="ctr"/>
           <a:lstStyle/>
           <a:p>
-            <a:pPr indent="0" marL="0">
+            <a:pPr marL="0" indent="0">
               <a:buNone/>
             </a:pPr>
             <a:r>
@@ -7328,6 +7373,7 @@
         <a:solidFill>
           <a:srgbClr val="1C3141"/>
         </a:solidFill>
+        <a:effectLst/>
       </p:bgPr>
     </p:bg>
     <p:spTree>
@@ -7365,7 +7411,7 @@
           <a:bodyPr wrap="square" lIns="0" tIns="0" rIns="0" bIns="0" rtlCol="0" anchor="ctr"/>
           <a:lstStyle/>
           <a:p>
-            <a:pPr indent="0" marL="0">
+            <a:pPr marL="0" indent="0">
               <a:buNone/>
             </a:pPr>
             <a:r>
@@ -7404,7 +7450,7 @@
           <a:bodyPr wrap="square" lIns="0" tIns="0" rIns="0" bIns="0" rtlCol="0" anchor="ctr"/>
           <a:lstStyle/>
           <a:p>
-            <a:pPr indent="0" marL="0">
+            <a:pPr marL="0" indent="0">
               <a:buNone/>
             </a:pPr>
             <a:r>
@@ -7441,6 +7487,13 @@
           </a:solidFill>
           <a:ln/>
         </p:spPr>
+        <p:txBody>
+          <a:bodyPr/>
+          <a:lstStyle/>
+          <a:p>
+            <a:endParaRPr lang="en-US"/>
+          </a:p>
+        </p:txBody>
       </p:sp>
       <p:sp>
         <p:nvSpPr>
@@ -7463,7 +7516,7 @@
           <a:bodyPr wrap="square" lIns="0" tIns="0" rIns="0" bIns="0" rtlCol="0" anchor="ctr"/>
           <a:lstStyle/>
           <a:p>
-            <a:pPr indent="0" marL="0">
+            <a:pPr marL="0" indent="0">
               <a:buNone/>
             </a:pPr>
             <a:r>
@@ -7502,7 +7555,7 @@
           <a:bodyPr wrap="square" lIns="0" tIns="0" rIns="0" bIns="0" rtlCol="0" anchor="ctr"/>
           <a:lstStyle/>
           <a:p>
-            <a:pPr indent="0" marL="0">
+            <a:pPr marL="0" indent="0">
               <a:buNone/>
             </a:pPr>
             <a:r>
@@ -7564,6 +7617,13 @@
           </a:solidFill>
           <a:ln/>
         </p:spPr>
+        <p:txBody>
+          <a:bodyPr/>
+          <a:lstStyle/>
+          <a:p>
+            <a:endParaRPr lang="en-US"/>
+          </a:p>
+        </p:txBody>
       </p:sp>
       <p:sp>
         <p:nvSpPr>
@@ -7586,11 +7646,11 @@
           <a:bodyPr wrap="square" lIns="0" tIns="0" rIns="0" bIns="0" rtlCol="0" anchor="ctr"/>
           <a:lstStyle/>
           <a:p>
-            <a:pPr indent="0" marL="0">
-              <a:buNone/>
-            </a:pPr>
-            <a:r>
-              <a:rPr lang="en-US" sz="1100" spc="60" kern="0" dirty="0">
+            <a:pPr marL="0" indent="0">
+              <a:buNone/>
+            </a:pPr>
+            <a:r>
+              <a:rPr lang="en-US" sz="1100" kern="0" spc="60" dirty="0">
                 <a:solidFill>
                   <a:srgbClr val="6B7A85"/>
                 </a:solidFill>
@@ -7625,7 +7685,7 @@
           <a:bodyPr wrap="square" lIns="0" tIns="0" rIns="0" bIns="0" rtlCol="0" anchor="t"/>
           <a:lstStyle/>
           <a:p>
-            <a:pPr indent="0" marL="0">
+            <a:pPr marL="0" indent="0">
               <a:buNone/>
             </a:pPr>
             <a:r>
@@ -7669,6 +7729,13 @@
             <a:prstDash val="solid"/>
           </a:ln>
         </p:spPr>
+        <p:txBody>
+          <a:bodyPr/>
+          <a:lstStyle/>
+          <a:p>
+            <a:endParaRPr lang="en-US"/>
+          </a:p>
+        </p:txBody>
       </p:sp>
       <p:sp>
         <p:nvSpPr>
@@ -7691,7 +7758,7 @@
           <a:bodyPr wrap="square" lIns="0" tIns="0" rIns="0" bIns="0" rtlCol="0" anchor="ctr"/>
           <a:lstStyle/>
           <a:p>
-            <a:pPr indent="0" marL="0">
+            <a:pPr marL="0" indent="0">
               <a:buNone/>
             </a:pPr>
             <a:r>
@@ -7730,7 +7797,7 @@
           <a:bodyPr wrap="square" lIns="0" tIns="0" rIns="0" bIns="0" rtlCol="0" anchor="ctr"/>
           <a:lstStyle/>
           <a:p>
-            <a:pPr indent="0" marL="0">
+            <a:pPr marL="0" indent="0">
               <a:buNone/>
             </a:pPr>
             <a:r>
@@ -7769,7 +7836,7 @@
           <a:bodyPr wrap="square" lIns="0" tIns="0" rIns="0" bIns="0" rtlCol="0" anchor="ctr"/>
           <a:lstStyle/>
           <a:p>
-            <a:pPr indent="0" marL="0">
+            <a:pPr marL="0" indent="0">
               <a:buNone/>
             </a:pPr>
             <a:r>
@@ -7813,6 +7880,13 @@
             <a:prstDash val="solid"/>
           </a:ln>
         </p:spPr>
+        <p:txBody>
+          <a:bodyPr/>
+          <a:lstStyle/>
+          <a:p>
+            <a:endParaRPr lang="en-US"/>
+          </a:p>
+        </p:txBody>
       </p:sp>
       <p:sp>
         <p:nvSpPr>
@@ -7835,7 +7909,7 @@
           <a:bodyPr wrap="square" lIns="0" tIns="0" rIns="0" bIns="0" rtlCol="0" anchor="ctr"/>
           <a:lstStyle/>
           <a:p>
-            <a:pPr indent="0" marL="0">
+            <a:pPr marL="0" indent="0">
               <a:buNone/>
             </a:pPr>
             <a:r>
@@ -7874,7 +7948,7 @@
           <a:bodyPr wrap="square" lIns="0" tIns="0" rIns="0" bIns="0" rtlCol="0" anchor="ctr"/>
           <a:lstStyle/>
           <a:p>
-            <a:pPr indent="0" marL="0">
+            <a:pPr marL="0" indent="0">
               <a:buNone/>
             </a:pPr>
             <a:r>
@@ -7913,7 +7987,7 @@
           <a:bodyPr wrap="square" lIns="0" tIns="0" rIns="0" bIns="0" rtlCol="0" anchor="ctr"/>
           <a:lstStyle/>
           <a:p>
-            <a:pPr indent="0" marL="0">
+            <a:pPr marL="0" indent="0">
               <a:buNone/>
             </a:pPr>
             <a:r>
@@ -7957,6 +8031,13 @@
             <a:prstDash val="solid"/>
           </a:ln>
         </p:spPr>
+        <p:txBody>
+          <a:bodyPr/>
+          <a:lstStyle/>
+          <a:p>
+            <a:endParaRPr lang="en-US"/>
+          </a:p>
+        </p:txBody>
       </p:sp>
       <p:sp>
         <p:nvSpPr>
@@ -7979,7 +8060,7 @@
           <a:bodyPr wrap="square" lIns="0" tIns="0" rIns="0" bIns="0" rtlCol="0" anchor="ctr"/>
           <a:lstStyle/>
           <a:p>
-            <a:pPr indent="0" marL="0">
+            <a:pPr marL="0" indent="0">
               <a:buNone/>
             </a:pPr>
             <a:r>
@@ -8018,7 +8099,7 @@
           <a:bodyPr wrap="square" lIns="0" tIns="0" rIns="0" bIns="0" rtlCol="0" anchor="ctr"/>
           <a:lstStyle/>
           <a:p>
-            <a:pPr indent="0" marL="0">
+            <a:pPr marL="0" indent="0">
               <a:buNone/>
             </a:pPr>
             <a:r>
@@ -8057,7 +8138,7 @@
           <a:bodyPr wrap="square" lIns="0" tIns="0" rIns="0" bIns="0" rtlCol="0" anchor="ctr"/>
           <a:lstStyle/>
           <a:p>
-            <a:pPr indent="0" marL="0">
+            <a:pPr marL="0" indent="0">
               <a:buNone/>
             </a:pPr>
             <a:r>
@@ -8101,6 +8182,13 @@
             <a:prstDash val="solid"/>
           </a:ln>
         </p:spPr>
+        <p:txBody>
+          <a:bodyPr/>
+          <a:lstStyle/>
+          <a:p>
+            <a:endParaRPr lang="en-US"/>
+          </a:p>
+        </p:txBody>
       </p:sp>
       <p:sp>
         <p:nvSpPr>
@@ -8123,7 +8211,7 @@
           <a:bodyPr wrap="square" lIns="0" tIns="0" rIns="0" bIns="0" rtlCol="0" anchor="ctr"/>
           <a:lstStyle/>
           <a:p>
-            <a:pPr indent="0" marL="0">
+            <a:pPr marL="0" indent="0">
               <a:buNone/>
             </a:pPr>
             <a:r>
@@ -8162,7 +8250,7 @@
           <a:bodyPr wrap="square" lIns="0" tIns="0" rIns="0" bIns="0" rtlCol="0" anchor="ctr"/>
           <a:lstStyle/>
           <a:p>
-            <a:pPr indent="0" marL="0">
+            <a:pPr marL="0" indent="0">
               <a:buNone/>
             </a:pPr>
             <a:r>
@@ -8201,7 +8289,7 @@
           <a:bodyPr wrap="square" lIns="0" tIns="0" rIns="0" bIns="0" rtlCol="0" anchor="ctr"/>
           <a:lstStyle/>
           <a:p>
-            <a:pPr indent="0" marL="0">
+            <a:pPr marL="0" indent="0">
               <a:buNone/>
             </a:pPr>
             <a:r>
@@ -8240,7 +8328,7 @@
           <a:bodyPr wrap="square" lIns="0" tIns="0" rIns="0" bIns="0" rtlCol="0" anchor="ctr"/>
           <a:lstStyle/>
           <a:p>
-            <a:pPr indent="0" marL="0">
+            <a:pPr marL="0" indent="0">
               <a:buNone/>
             </a:pPr>
             <a:r>
@@ -8302,6 +8390,13 @@
           </a:solidFill>
           <a:ln/>
         </p:spPr>
+        <p:txBody>
+          <a:bodyPr/>
+          <a:lstStyle/>
+          <a:p>
+            <a:endParaRPr lang="en-US"/>
+          </a:p>
+        </p:txBody>
       </p:sp>
       <p:sp>
         <p:nvSpPr>
@@ -8324,11 +8419,11 @@
           <a:bodyPr wrap="square" lIns="0" tIns="0" rIns="0" bIns="0" rtlCol="0" anchor="ctr"/>
           <a:lstStyle/>
           <a:p>
-            <a:pPr indent="0" marL="0">
-              <a:buNone/>
-            </a:pPr>
-            <a:r>
-              <a:rPr lang="en-US" sz="1100" spc="60" kern="0" dirty="0">
+            <a:pPr marL="0" indent="0">
+              <a:buNone/>
+            </a:pPr>
+            <a:r>
+              <a:rPr lang="en-US" sz="1100" kern="0" spc="60" dirty="0">
                 <a:solidFill>
                   <a:srgbClr val="6B7A85"/>
                 </a:solidFill>
@@ -8363,7 +8458,7 @@
           <a:bodyPr wrap="square" lIns="0" tIns="0" rIns="0" bIns="0" rtlCol="0" anchor="t"/>
           <a:lstStyle/>
           <a:p>
-            <a:pPr indent="0" marL="0">
+            <a:pPr marL="0" indent="0">
               <a:buNone/>
             </a:pPr>
             <a:r>
@@ -8407,6 +8502,13 @@
             <a:prstDash val="solid"/>
           </a:ln>
         </p:spPr>
+        <p:txBody>
+          <a:bodyPr/>
+          <a:lstStyle/>
+          <a:p>
+            <a:endParaRPr lang="en-US"/>
+          </a:p>
+        </p:txBody>
       </p:sp>
       <p:sp>
         <p:nvSpPr>
@@ -8427,6 +8529,13 @@
           </a:solidFill>
           <a:ln/>
         </p:spPr>
+        <p:txBody>
+          <a:bodyPr/>
+          <a:lstStyle/>
+          <a:p>
+            <a:endParaRPr lang="en-US"/>
+          </a:p>
+        </p:txBody>
       </p:sp>
       <p:sp>
         <p:nvSpPr>
@@ -8449,7 +8558,7 @@
           <a:bodyPr wrap="square" lIns="0" tIns="0" rIns="0" bIns="0" rtlCol="0" anchor="ctr"/>
           <a:lstStyle/>
           <a:p>
-            <a:pPr indent="0" marL="0">
+            <a:pPr marL="0" indent="0">
               <a:buNone/>
             </a:pPr>
             <a:r>
@@ -8488,7 +8597,7 @@
           <a:bodyPr wrap="square" lIns="0" tIns="0" rIns="0" bIns="0" rtlCol="0" anchor="ctr"/>
           <a:lstStyle/>
           <a:p>
-            <a:pPr indent="0" marL="0">
+            <a:pPr marL="0" indent="0">
               <a:buNone/>
             </a:pPr>
             <a:r>
@@ -8532,6 +8641,13 @@
             <a:prstDash val="solid"/>
           </a:ln>
         </p:spPr>
+        <p:txBody>
+          <a:bodyPr/>
+          <a:lstStyle/>
+          <a:p>
+            <a:endParaRPr lang="en-US"/>
+          </a:p>
+        </p:txBody>
       </p:sp>
       <p:sp>
         <p:nvSpPr>
@@ -8552,6 +8668,13 @@
           </a:solidFill>
           <a:ln/>
         </p:spPr>
+        <p:txBody>
+          <a:bodyPr/>
+          <a:lstStyle/>
+          <a:p>
+            <a:endParaRPr lang="en-US"/>
+          </a:p>
+        </p:txBody>
       </p:sp>
       <p:sp>
         <p:nvSpPr>
@@ -8574,7 +8697,7 @@
           <a:bodyPr wrap="square" lIns="0" tIns="0" rIns="0" bIns="0" rtlCol="0" anchor="ctr"/>
           <a:lstStyle/>
           <a:p>
-            <a:pPr indent="0" marL="0">
+            <a:pPr marL="0" indent="0">
               <a:buNone/>
             </a:pPr>
             <a:r>
@@ -8613,7 +8736,7 @@
           <a:bodyPr wrap="square" lIns="0" tIns="0" rIns="0" bIns="0" rtlCol="0" anchor="ctr"/>
           <a:lstStyle/>
           <a:p>
-            <a:pPr indent="0" marL="0">
+            <a:pPr marL="0" indent="0">
               <a:buNone/>
             </a:pPr>
             <a:r>
@@ -8657,6 +8780,13 @@
             <a:prstDash val="solid"/>
           </a:ln>
         </p:spPr>
+        <p:txBody>
+          <a:bodyPr/>
+          <a:lstStyle/>
+          <a:p>
+            <a:endParaRPr lang="en-US"/>
+          </a:p>
+        </p:txBody>
       </p:sp>
       <p:sp>
         <p:nvSpPr>
@@ -8677,6 +8807,13 @@
           </a:solidFill>
           <a:ln/>
         </p:spPr>
+        <p:txBody>
+          <a:bodyPr/>
+          <a:lstStyle/>
+          <a:p>
+            <a:endParaRPr lang="en-US"/>
+          </a:p>
+        </p:txBody>
       </p:sp>
       <p:sp>
         <p:nvSpPr>
@@ -8699,7 +8836,7 @@
           <a:bodyPr wrap="square" lIns="0" tIns="0" rIns="0" bIns="0" rtlCol="0" anchor="ctr"/>
           <a:lstStyle/>
           <a:p>
-            <a:pPr indent="0" marL="0">
+            <a:pPr marL="0" indent="0">
               <a:buNone/>
             </a:pPr>
             <a:r>
@@ -8738,7 +8875,7 @@
           <a:bodyPr wrap="square" lIns="0" tIns="0" rIns="0" bIns="0" rtlCol="0" anchor="ctr"/>
           <a:lstStyle/>
           <a:p>
-            <a:pPr indent="0" marL="0">
+            <a:pPr marL="0" indent="0">
               <a:buNone/>
             </a:pPr>
             <a:r>
@@ -8777,7 +8914,7 @@
           <a:bodyPr wrap="square" lIns="0" tIns="0" rIns="0" bIns="0" rtlCol="0" anchor="ctr"/>
           <a:lstStyle/>
           <a:p>
-            <a:pPr indent="0" marL="0">
+            <a:pPr marL="0" indent="0">
               <a:buNone/>
             </a:pPr>
             <a:r>
@@ -8816,7 +8953,7 @@
           <a:bodyPr wrap="square" lIns="0" tIns="0" rIns="0" bIns="0" rtlCol="0" anchor="ctr"/>
           <a:lstStyle/>
           <a:p>
-            <a:pPr indent="0" marL="0">
+            <a:pPr marL="0" indent="0">
               <a:buNone/>
             </a:pPr>
             <a:r>
@@ -8878,6 +9015,13 @@
           </a:solidFill>
           <a:ln/>
         </p:spPr>
+        <p:txBody>
+          <a:bodyPr/>
+          <a:lstStyle/>
+          <a:p>
+            <a:endParaRPr lang="en-US"/>
+          </a:p>
+        </p:txBody>
       </p:sp>
       <p:sp>
         <p:nvSpPr>
@@ -8900,11 +9044,11 @@
           <a:bodyPr wrap="square" lIns="0" tIns="0" rIns="0" bIns="0" rtlCol="0" anchor="ctr"/>
           <a:lstStyle/>
           <a:p>
-            <a:pPr indent="0" marL="0">
-              <a:buNone/>
-            </a:pPr>
-            <a:r>
-              <a:rPr lang="en-US" sz="1100" spc="60" kern="0" dirty="0">
+            <a:pPr marL="0" indent="0">
+              <a:buNone/>
+            </a:pPr>
+            <a:r>
+              <a:rPr lang="en-US" sz="1100" kern="0" spc="60" dirty="0">
                 <a:solidFill>
                   <a:srgbClr val="6B7A85"/>
                 </a:solidFill>
@@ -8939,7 +9083,7 @@
           <a:bodyPr wrap="square" lIns="0" tIns="0" rIns="0" bIns="0" rtlCol="0" anchor="t"/>
           <a:lstStyle/>
           <a:p>
-            <a:pPr indent="0" marL="0">
+            <a:pPr marL="0" indent="0">
               <a:buNone/>
             </a:pPr>
             <a:r>
@@ -8976,6 +9120,13 @@
           </a:solidFill>
           <a:ln/>
         </p:spPr>
+        <p:txBody>
+          <a:bodyPr/>
+          <a:lstStyle/>
+          <a:p>
+            <a:endParaRPr lang="en-US"/>
+          </a:p>
+        </p:txBody>
       </p:sp>
       <p:sp>
         <p:nvSpPr>
@@ -8998,7 +9149,7 @@
           <a:bodyPr wrap="square" lIns="0" tIns="0" rIns="0" bIns="0" rtlCol="0" anchor="ctr"/>
           <a:lstStyle/>
           <a:p>
-            <a:pPr algn="ctr" indent="0" marL="0">
+            <a:pPr marL="0" indent="0" algn="ctr">
               <a:buNone/>
             </a:pPr>
             <a:r>
@@ -9037,7 +9188,7 @@
           <a:bodyPr wrap="square" lIns="0" tIns="0" rIns="0" bIns="0" rtlCol="0" anchor="ctr"/>
           <a:lstStyle/>
           <a:p>
-            <a:pPr indent="0" marL="0">
+            <a:pPr marL="0" indent="0">
               <a:buNone/>
             </a:pPr>
             <a:r>
@@ -9076,7 +9227,7 @@
           <a:bodyPr wrap="square" lIns="0" tIns="0" rIns="0" bIns="0" rtlCol="0" anchor="ctr"/>
           <a:lstStyle/>
           <a:p>
-            <a:pPr indent="0" marL="0">
+            <a:pPr marL="0" indent="0">
               <a:buNone/>
             </a:pPr>
             <a:r>
@@ -9113,6 +9264,13 @@
           </a:solidFill>
           <a:ln/>
         </p:spPr>
+        <p:txBody>
+          <a:bodyPr/>
+          <a:lstStyle/>
+          <a:p>
+            <a:endParaRPr lang="en-US"/>
+          </a:p>
+        </p:txBody>
       </p:sp>
       <p:sp>
         <p:nvSpPr>
@@ -9135,7 +9293,7 @@
           <a:bodyPr wrap="square" lIns="0" tIns="0" rIns="0" bIns="0" rtlCol="0" anchor="ctr"/>
           <a:lstStyle/>
           <a:p>
-            <a:pPr algn="ctr" indent="0" marL="0">
+            <a:pPr marL="0" indent="0" algn="ctr">
               <a:buNone/>
             </a:pPr>
             <a:r>
@@ -9174,7 +9332,7 @@
           <a:bodyPr wrap="square" lIns="0" tIns="0" rIns="0" bIns="0" rtlCol="0" anchor="ctr"/>
           <a:lstStyle/>
           <a:p>
-            <a:pPr indent="0" marL="0">
+            <a:pPr marL="0" indent="0">
               <a:buNone/>
             </a:pPr>
             <a:r>
@@ -9213,7 +9371,7 @@
           <a:bodyPr wrap="square" lIns="0" tIns="0" rIns="0" bIns="0" rtlCol="0" anchor="ctr"/>
           <a:lstStyle/>
           <a:p>
-            <a:pPr indent="0" marL="0">
+            <a:pPr marL="0" indent="0">
               <a:buNone/>
             </a:pPr>
             <a:r>
@@ -9250,6 +9408,13 @@
           </a:solidFill>
           <a:ln/>
         </p:spPr>
+        <p:txBody>
+          <a:bodyPr/>
+          <a:lstStyle/>
+          <a:p>
+            <a:endParaRPr lang="en-US"/>
+          </a:p>
+        </p:txBody>
       </p:sp>
       <p:sp>
         <p:nvSpPr>
@@ -9272,7 +9437,7 @@
           <a:bodyPr wrap="square" lIns="0" tIns="0" rIns="0" bIns="0" rtlCol="0" anchor="ctr"/>
           <a:lstStyle/>
           <a:p>
-            <a:pPr algn="ctr" indent="0" marL="0">
+            <a:pPr marL="0" indent="0" algn="ctr">
               <a:buNone/>
             </a:pPr>
             <a:r>
@@ -9311,7 +9476,7 @@
           <a:bodyPr wrap="square" lIns="0" tIns="0" rIns="0" bIns="0" rtlCol="0" anchor="ctr"/>
           <a:lstStyle/>
           <a:p>
-            <a:pPr indent="0" marL="0">
+            <a:pPr marL="0" indent="0">
               <a:buNone/>
             </a:pPr>
             <a:r>
@@ -9350,7 +9515,7 @@
           <a:bodyPr wrap="square" lIns="0" tIns="0" rIns="0" bIns="0" rtlCol="0" anchor="ctr"/>
           <a:lstStyle/>
           <a:p>
-            <a:pPr indent="0" marL="0">
+            <a:pPr marL="0" indent="0">
               <a:buNone/>
             </a:pPr>
             <a:r>
@@ -9387,6 +9552,13 @@
           </a:solidFill>
           <a:ln/>
         </p:spPr>
+        <p:txBody>
+          <a:bodyPr/>
+          <a:lstStyle/>
+          <a:p>
+            <a:endParaRPr lang="en-US"/>
+          </a:p>
+        </p:txBody>
       </p:sp>
       <p:sp>
         <p:nvSpPr>
@@ -9409,7 +9581,7 @@
           <a:bodyPr wrap="square" lIns="0" tIns="0" rIns="0" bIns="0" rtlCol="0" anchor="ctr"/>
           <a:lstStyle/>
           <a:p>
-            <a:pPr algn="ctr" indent="0" marL="0">
+            <a:pPr marL="0" indent="0" algn="ctr">
               <a:buNone/>
             </a:pPr>
             <a:r>
@@ -9448,7 +9620,7 @@
           <a:bodyPr wrap="square" lIns="0" tIns="0" rIns="0" bIns="0" rtlCol="0" anchor="ctr"/>
           <a:lstStyle/>
           <a:p>
-            <a:pPr indent="0" marL="0">
+            <a:pPr marL="0" indent="0">
               <a:buNone/>
             </a:pPr>
             <a:r>
@@ -9487,7 +9659,7 @@
           <a:bodyPr wrap="square" lIns="0" tIns="0" rIns="0" bIns="0" rtlCol="0" anchor="ctr"/>
           <a:lstStyle/>
           <a:p>
-            <a:pPr indent="0" marL="0">
+            <a:pPr marL="0" indent="0">
               <a:buNone/>
             </a:pPr>
             <a:r>
@@ -9549,6 +9721,13 @@
           </a:solidFill>
           <a:ln/>
         </p:spPr>
+        <p:txBody>
+          <a:bodyPr/>
+          <a:lstStyle/>
+          <a:p>
+            <a:endParaRPr lang="en-US"/>
+          </a:p>
+        </p:txBody>
       </p:sp>
       <p:sp>
         <p:nvSpPr>
@@ -9571,11 +9750,11 @@
           <a:bodyPr wrap="square" lIns="0" tIns="0" rIns="0" bIns="0" rtlCol="0" anchor="ctr"/>
           <a:lstStyle/>
           <a:p>
-            <a:pPr indent="0" marL="0">
-              <a:buNone/>
-            </a:pPr>
-            <a:r>
-              <a:rPr lang="en-US" sz="1100" spc="60" kern="0" dirty="0">
+            <a:pPr marL="0" indent="0">
+              <a:buNone/>
+            </a:pPr>
+            <a:r>
+              <a:rPr lang="en-US" sz="1100" kern="0" spc="60" dirty="0">
                 <a:solidFill>
                   <a:srgbClr val="6B7A85"/>
                 </a:solidFill>
@@ -9610,7 +9789,7 @@
           <a:bodyPr wrap="square" lIns="0" tIns="0" rIns="0" bIns="0" rtlCol="0" anchor="t"/>
           <a:lstStyle/>
           <a:p>
-            <a:pPr indent="0" marL="0">
+            <a:pPr marL="0" indent="0">
               <a:buNone/>
             </a:pPr>
             <a:r>
@@ -9649,7 +9828,7 @@
           <a:bodyPr wrap="square" lIns="0" tIns="0" rIns="0" bIns="0" rtlCol="0" anchor="ctr"/>
           <a:lstStyle/>
           <a:p>
-            <a:pPr indent="0" marL="0">
+            <a:pPr marL="0" indent="0">
               <a:buNone/>
             </a:pPr>
             <a:r>
@@ -9661,7 +9840,7 @@
                 <a:ea typeface="Calibri" pitchFamily="34" charset="-122"/>
                 <a:cs typeface="Calibri" pitchFamily="34" charset="-120"/>
               </a:rPr>
-              <a:t>CMS publishes a revision history inside every coverage determination. That is our answer key, which means nothing here was hand-labelled by me.</a:t>
+              <a:t>CMS publishes a revision history inside every coverage determination. That is my answer key.</a:t>
             </a:r>
             <a:endParaRPr lang="en-US" sz="1400" dirty="0"/>
           </a:p>
@@ -9693,6 +9872,13 @@
             <a:prstDash val="solid"/>
           </a:ln>
         </p:spPr>
+        <p:txBody>
+          <a:bodyPr/>
+          <a:lstStyle/>
+          <a:p>
+            <a:endParaRPr lang="en-US"/>
+          </a:p>
+        </p:txBody>
       </p:sp>
       <p:sp>
         <p:nvSpPr>
@@ -9715,7 +9901,7 @@
           <a:bodyPr wrap="square" lIns="0" tIns="0" rIns="0" bIns="0" rtlCol="0" anchor="ctr"/>
           <a:lstStyle/>
           <a:p>
-            <a:pPr indent="0" marL="0">
+            <a:pPr marL="0" indent="0">
               <a:buNone/>
             </a:pPr>
             <a:r>
@@ -9754,7 +9940,7 @@
           <a:bodyPr wrap="square" lIns="0" tIns="0" rIns="0" bIns="0" rtlCol="0" anchor="ctr"/>
           <a:lstStyle/>
           <a:p>
-            <a:pPr indent="0" marL="0">
+            <a:pPr marL="0" indent="0">
               <a:buNone/>
             </a:pPr>
             <a:r>
@@ -9793,7 +9979,7 @@
           <a:bodyPr wrap="square" lIns="0" tIns="0" rIns="0" bIns="0" rtlCol="0" anchor="ctr"/>
           <a:lstStyle/>
           <a:p>
-            <a:pPr algn="r" indent="0" marL="0">
+            <a:pPr marL="0" indent="0" algn="r">
               <a:buNone/>
             </a:pPr>
             <a:r>
@@ -9837,6 +10023,13 @@
             <a:prstDash val="solid"/>
           </a:ln>
         </p:spPr>
+        <p:txBody>
+          <a:bodyPr/>
+          <a:lstStyle/>
+          <a:p>
+            <a:endParaRPr lang="en-US"/>
+          </a:p>
+        </p:txBody>
       </p:sp>
       <p:sp>
         <p:nvSpPr>
@@ -9859,7 +10052,7 @@
           <a:bodyPr wrap="square" lIns="0" tIns="0" rIns="0" bIns="0" rtlCol="0" anchor="ctr"/>
           <a:lstStyle/>
           <a:p>
-            <a:pPr indent="0" marL="0">
+            <a:pPr marL="0" indent="0">
               <a:buNone/>
             </a:pPr>
             <a:r>
@@ -9898,7 +10091,7 @@
           <a:bodyPr wrap="square" lIns="0" tIns="0" rIns="0" bIns="0" rtlCol="0" anchor="ctr"/>
           <a:lstStyle/>
           <a:p>
-            <a:pPr indent="0" marL="0">
+            <a:pPr marL="0" indent="0">
               <a:buNone/>
             </a:pPr>
             <a:r>
@@ -9937,7 +10130,7 @@
           <a:bodyPr wrap="square" lIns="0" tIns="0" rIns="0" bIns="0" rtlCol="0" anchor="ctr"/>
           <a:lstStyle/>
           <a:p>
-            <a:pPr algn="r" indent="0" marL="0">
+            <a:pPr marL="0" indent="0" algn="r">
               <a:buNone/>
             </a:pPr>
             <a:r>
@@ -9981,6 +10174,13 @@
             <a:prstDash val="solid"/>
           </a:ln>
         </p:spPr>
+        <p:txBody>
+          <a:bodyPr/>
+          <a:lstStyle/>
+          <a:p>
+            <a:endParaRPr lang="en-US"/>
+          </a:p>
+        </p:txBody>
       </p:sp>
       <p:sp>
         <p:nvSpPr>
@@ -10003,7 +10203,7 @@
           <a:bodyPr wrap="square" lIns="0" tIns="0" rIns="0" bIns="0" rtlCol="0" anchor="ctr"/>
           <a:lstStyle/>
           <a:p>
-            <a:pPr indent="0" marL="0">
+            <a:pPr marL="0" indent="0">
               <a:buNone/>
             </a:pPr>
             <a:r>
@@ -10042,7 +10242,7 @@
           <a:bodyPr wrap="square" lIns="0" tIns="0" rIns="0" bIns="0" rtlCol="0" anchor="ctr"/>
           <a:lstStyle/>
           <a:p>
-            <a:pPr indent="0" marL="0">
+            <a:pPr marL="0" indent="0">
               <a:buNone/>
             </a:pPr>
             <a:r>
@@ -10081,7 +10281,7 @@
           <a:bodyPr wrap="square" lIns="0" tIns="0" rIns="0" bIns="0" rtlCol="0" anchor="ctr"/>
           <a:lstStyle/>
           <a:p>
-            <a:pPr algn="r" indent="0" marL="0">
+            <a:pPr marL="0" indent="0" algn="r">
               <a:buNone/>
             </a:pPr>
             <a:r>
@@ -10125,6 +10325,13 @@
             <a:prstDash val="solid"/>
           </a:ln>
         </p:spPr>
+        <p:txBody>
+          <a:bodyPr/>
+          <a:lstStyle/>
+          <a:p>
+            <a:endParaRPr lang="en-US"/>
+          </a:p>
+        </p:txBody>
       </p:sp>
       <p:sp>
         <p:nvSpPr>
@@ -10147,7 +10354,7 @@
           <a:bodyPr wrap="square" lIns="0" tIns="0" rIns="0" bIns="0" rtlCol="0" anchor="ctr"/>
           <a:lstStyle/>
           <a:p>
-            <a:pPr indent="0" marL="0">
+            <a:pPr marL="0" indent="0">
               <a:buNone/>
             </a:pPr>
             <a:r>
@@ -10186,7 +10393,7 @@
           <a:bodyPr wrap="square" lIns="0" tIns="0" rIns="0" bIns="0" rtlCol="0" anchor="ctr"/>
           <a:lstStyle/>
           <a:p>
-            <a:pPr indent="0" marL="0">
+            <a:pPr marL="0" indent="0">
               <a:buNone/>
             </a:pPr>
             <a:r>
@@ -10225,7 +10432,7 @@
           <a:bodyPr wrap="square" lIns="0" tIns="0" rIns="0" bIns="0" rtlCol="0" anchor="ctr"/>
           <a:lstStyle/>
           <a:p>
-            <a:pPr algn="r" indent="0" marL="0">
+            <a:pPr marL="0" indent="0" algn="r">
               <a:buNone/>
             </a:pPr>
             <a:r>
@@ -10264,7 +10471,7 @@
           <a:bodyPr wrap="square" lIns="0" tIns="0" rIns="0" bIns="0" rtlCol="0" anchor="ctr"/>
           <a:lstStyle/>
           <a:p>
-            <a:pPr indent="0" marL="0">
+            <a:pPr marL="0" indent="0">
               <a:buNone/>
             </a:pPr>
             <a:r>
@@ -10298,6 +10505,7 @@
         <a:solidFill>
           <a:srgbClr val="1C3141"/>
         </a:solidFill>
+        <a:effectLst/>
       </p:bgPr>
     </p:bg>
     <p:spTree>
@@ -10333,6 +10541,13 @@
           </a:solidFill>
           <a:ln/>
         </p:spPr>
+        <p:txBody>
+          <a:bodyPr/>
+          <a:lstStyle/>
+          <a:p>
+            <a:endParaRPr lang="en-US"/>
+          </a:p>
+        </p:txBody>
       </p:sp>
       <p:sp>
         <p:nvSpPr>
@@ -10355,11 +10570,11 @@
           <a:bodyPr wrap="square" lIns="0" tIns="0" rIns="0" bIns="0" rtlCol="0" anchor="ctr"/>
           <a:lstStyle/>
           <a:p>
-            <a:pPr indent="0" marL="0">
-              <a:buNone/>
-            </a:pPr>
-            <a:r>
-              <a:rPr lang="en-US" sz="1100" spc="60" kern="0" dirty="0">
+            <a:pPr marL="0" indent="0">
+              <a:buNone/>
+            </a:pPr>
+            <a:r>
+              <a:rPr lang="en-US" sz="1100" kern="0" spc="60" dirty="0">
                 <a:solidFill>
                   <a:srgbClr val="6B7A85"/>
                 </a:solidFill>
@@ -10394,7 +10609,7 @@
           <a:bodyPr wrap="square" lIns="0" tIns="0" rIns="0" bIns="0" rtlCol="0" anchor="t"/>
           <a:lstStyle/>
           <a:p>
-            <a:pPr indent="0" marL="0">
+            <a:pPr marL="0" indent="0">
               <a:buNone/>
             </a:pPr>
             <a:r>
@@ -10438,6 +10653,13 @@
             <a:prstDash val="solid"/>
           </a:ln>
         </p:spPr>
+        <p:txBody>
+          <a:bodyPr/>
+          <a:lstStyle/>
+          <a:p>
+            <a:endParaRPr lang="en-US"/>
+          </a:p>
+        </p:txBody>
       </p:sp>
       <p:sp>
         <p:nvSpPr>
@@ -10460,7 +10682,7 @@
           <a:bodyPr wrap="square" lIns="0" tIns="0" rIns="0" bIns="0" rtlCol="0" anchor="ctr"/>
           <a:lstStyle/>
           <a:p>
-            <a:pPr indent="0" marL="0">
+            <a:pPr marL="0" indent="0">
               <a:buNone/>
             </a:pPr>
             <a:r>
@@ -10499,7 +10721,7 @@
           <a:bodyPr wrap="square" lIns="0" tIns="0" rIns="0" bIns="0" rtlCol="0" anchor="ctr"/>
           <a:lstStyle/>
           <a:p>
-            <a:pPr indent="0" marL="0">
+            <a:pPr marL="0" indent="0">
               <a:buNone/>
             </a:pPr>
             <a:r>
@@ -10543,6 +10765,13 @@
             <a:prstDash val="solid"/>
           </a:ln>
         </p:spPr>
+        <p:txBody>
+          <a:bodyPr/>
+          <a:lstStyle/>
+          <a:p>
+            <a:endParaRPr lang="en-US"/>
+          </a:p>
+        </p:txBody>
       </p:sp>
       <p:sp>
         <p:nvSpPr>
@@ -10565,7 +10794,7 @@
           <a:bodyPr wrap="square" lIns="0" tIns="0" rIns="0" bIns="0" rtlCol="0" anchor="ctr"/>
           <a:lstStyle/>
           <a:p>
-            <a:pPr indent="0" marL="0">
+            <a:pPr marL="0" indent="0">
               <a:buNone/>
             </a:pPr>
             <a:r>
@@ -10604,7 +10833,7 @@
           <a:bodyPr wrap="square" lIns="0" tIns="0" rIns="0" bIns="0" rtlCol="0" anchor="ctr"/>
           <a:lstStyle/>
           <a:p>
-            <a:pPr indent="0" marL="0">
+            <a:pPr marL="0" indent="0">
               <a:buNone/>
             </a:pPr>
             <a:r>
@@ -10648,6 +10877,13 @@
             <a:prstDash val="solid"/>
           </a:ln>
         </p:spPr>
+        <p:txBody>
+          <a:bodyPr/>
+          <a:lstStyle/>
+          <a:p>
+            <a:endParaRPr lang="en-US"/>
+          </a:p>
+        </p:txBody>
       </p:sp>
       <p:sp>
         <p:nvSpPr>
@@ -10670,7 +10906,7 @@
           <a:bodyPr wrap="square" lIns="0" tIns="0" rIns="0" bIns="0" rtlCol="0" anchor="ctr"/>
           <a:lstStyle/>
           <a:p>
-            <a:pPr indent="0" marL="0">
+            <a:pPr marL="0" indent="0">
               <a:buNone/>
             </a:pPr>
             <a:r>
@@ -10709,7 +10945,7 @@
           <a:bodyPr wrap="square" lIns="0" tIns="0" rIns="0" bIns="0" rtlCol="0" anchor="ctr"/>
           <a:lstStyle/>
           <a:p>
-            <a:pPr indent="0" marL="0">
+            <a:pPr marL="0" indent="0">
               <a:buNone/>
             </a:pPr>
             <a:r>
@@ -10753,6 +10989,13 @@
             <a:prstDash val="solid"/>
           </a:ln>
         </p:spPr>
+        <p:txBody>
+          <a:bodyPr/>
+          <a:lstStyle/>
+          <a:p>
+            <a:endParaRPr lang="en-US"/>
+          </a:p>
+        </p:txBody>
       </p:sp>
       <p:sp>
         <p:nvSpPr>
@@ -10775,7 +11018,7 @@
           <a:bodyPr wrap="square" lIns="0" tIns="0" rIns="0" bIns="0" rtlCol="0" anchor="ctr"/>
           <a:lstStyle/>
           <a:p>
-            <a:pPr indent="0" marL="0">
+            <a:pPr marL="0" indent="0">
               <a:buNone/>
             </a:pPr>
             <a:r>
@@ -10814,7 +11057,7 @@
           <a:bodyPr wrap="square" lIns="0" tIns="0" rIns="0" bIns="0" rtlCol="0" anchor="ctr"/>
           <a:lstStyle/>
           <a:p>
-            <a:pPr indent="0" marL="0">
+            <a:pPr marL="0" indent="0">
               <a:buNone/>
             </a:pPr>
             <a:r>
@@ -10853,7 +11096,7 @@
           <a:bodyPr wrap="square" lIns="0" tIns="0" rIns="0" bIns="0" rtlCol="0" anchor="ctr"/>
           <a:lstStyle/>
           <a:p>
-            <a:pPr indent="0" marL="0">
+            <a:pPr marL="0" indent="0">
               <a:buNone/>
             </a:pPr>
             <a:r>
@@ -10892,7 +11135,7 @@
           <a:bodyPr wrap="square" lIns="0" tIns="0" rIns="0" bIns="0" rtlCol="0" anchor="ctr"/>
           <a:lstStyle/>
           <a:p>
-            <a:pPr indent="0" marL="0">
+            <a:pPr marL="0" indent="0">
               <a:buNone/>
             </a:pPr>
             <a:r>
@@ -10931,7 +11174,7 @@
           <a:bodyPr wrap="square" lIns="0" tIns="0" rIns="0" bIns="0" rtlCol="0" anchor="ctr"/>
           <a:lstStyle/>
           <a:p>
-            <a:pPr indent="0" marL="0">
+            <a:pPr marL="0" indent="0">
               <a:buNone/>
             </a:pPr>
             <a:r>
@@ -10993,6 +11236,13 @@
           </a:solidFill>
           <a:ln/>
         </p:spPr>
+        <p:txBody>
+          <a:bodyPr/>
+          <a:lstStyle/>
+          <a:p>
+            <a:endParaRPr lang="en-US"/>
+          </a:p>
+        </p:txBody>
       </p:sp>
       <p:sp>
         <p:nvSpPr>
@@ -11015,11 +11265,11 @@
           <a:bodyPr wrap="square" lIns="0" tIns="0" rIns="0" bIns="0" rtlCol="0" anchor="ctr"/>
           <a:lstStyle/>
           <a:p>
-            <a:pPr indent="0" marL="0">
-              <a:buNone/>
-            </a:pPr>
-            <a:r>
-              <a:rPr lang="en-US" sz="1100" spc="60" kern="0" dirty="0">
+            <a:pPr marL="0" indent="0">
+              <a:buNone/>
+            </a:pPr>
+            <a:r>
+              <a:rPr lang="en-US" sz="1100" kern="0" spc="60" dirty="0">
                 <a:solidFill>
                   <a:srgbClr val="6B7A85"/>
                 </a:solidFill>
@@ -11054,7 +11304,7 @@
           <a:bodyPr wrap="square" lIns="0" tIns="0" rIns="0" bIns="0" rtlCol="0" anchor="t"/>
           <a:lstStyle/>
           <a:p>
-            <a:pPr indent="0" marL="0">
+            <a:pPr marL="0" indent="0">
               <a:buNone/>
             </a:pPr>
             <a:r>
@@ -11074,7 +11324,7 @@
       </p:sp>
       <p:graphicFrame>
         <p:nvGraphicFramePr>
-          <p:cNvPr id="5" name="Chart 0" descr=""/>
+          <p:cNvPr id="5" name="Chart 0"/>
           <p:cNvGraphicFramePr/>
           <p:nvPr/>
         </p:nvGraphicFramePr>
@@ -11082,9 +11332,9 @@
           <a:off x="594360" y="1691640"/>
           <a:ext cx="6766560" cy="3566160"/>
         </p:xfrm>
-        <a:graphic xmlns:a="http://schemas.openxmlformats.org/drawingml/2006/main">
+        <a:graphic>
           <a:graphicData uri="http://schemas.openxmlformats.org/drawingml/2006/chart">
-            <c:chart xmlns:c="http://schemas.openxmlformats.org/drawingml/2006/chart" r:id="rId1"/>
+            <c:chart xmlns:c="http://schemas.openxmlformats.org/drawingml/2006/chart" xmlns:r="http://schemas.openxmlformats.org/officeDocument/2006/relationships" r:id="rId3"/>
           </a:graphicData>
         </a:graphic>
       </p:graphicFrame>
@@ -11114,6 +11364,13 @@
             <a:prstDash val="solid"/>
           </a:ln>
         </p:spPr>
+        <p:txBody>
+          <a:bodyPr/>
+          <a:lstStyle/>
+          <a:p>
+            <a:endParaRPr lang="en-US"/>
+          </a:p>
+        </p:txBody>
       </p:sp>
       <p:sp>
         <p:nvSpPr>
@@ -11136,7 +11393,7 @@
           <a:bodyPr wrap="square" lIns="0" tIns="0" rIns="0" bIns="0" rtlCol="0" anchor="ctr"/>
           <a:lstStyle/>
           <a:p>
-            <a:pPr indent="0" marL="0">
+            <a:pPr marL="0" indent="0">
               <a:buNone/>
             </a:pPr>
             <a:r>
@@ -11175,7 +11432,7 @@
           <a:bodyPr wrap="square" lIns="0" tIns="0" rIns="0" bIns="0" rtlCol="0" anchor="t"/>
           <a:lstStyle/>
           <a:p>
-            <a:pPr indent="0" marL="0">
+            <a:pPr marL="0" indent="0">
               <a:buNone/>
             </a:pPr>
             <a:r>
@@ -11192,7 +11449,7 @@
             <a:endParaRPr lang="en-US" sz="1200" dirty="0"/>
           </a:p>
           <a:p>
-            <a:pPr indent="0" marL="0">
+            <a:pPr marL="0" indent="0">
               <a:buNone/>
             </a:pPr>
             <a:r>
@@ -11209,13 +11466,13 @@
             <a:endParaRPr lang="en-US" sz="1200" dirty="0"/>
           </a:p>
           <a:p>
-            <a:pPr indent="0" marL="0">
+            <a:pPr marL="0" indent="0">
               <a:buNone/>
             </a:pPr>
             <a:endParaRPr lang="en-US" sz="1200" dirty="0"/>
           </a:p>
           <a:p>
-            <a:pPr indent="0" marL="0">
+            <a:pPr marL="0" indent="0">
               <a:buNone/>
             </a:pPr>
             <a:r>
@@ -11232,7 +11489,7 @@
             <a:endParaRPr lang="en-US" sz="1200" dirty="0"/>
           </a:p>
           <a:p>
-            <a:pPr indent="0" marL="0">
+            <a:pPr marL="0" indent="0">
               <a:buNone/>
             </a:pPr>
             <a:r>
@@ -11249,13 +11506,13 @@
             <a:endParaRPr lang="en-US" sz="1200" dirty="0"/>
           </a:p>
           <a:p>
-            <a:pPr indent="0" marL="0">
+            <a:pPr marL="0" indent="0">
               <a:buNone/>
             </a:pPr>
             <a:endParaRPr lang="en-US" sz="1200" dirty="0"/>
           </a:p>
           <a:p>
-            <a:pPr indent="0" marL="0">
+            <a:pPr marL="0" indent="0">
               <a:buNone/>
             </a:pPr>
             <a:r>
@@ -11272,7 +11529,7 @@
             <a:endParaRPr lang="en-US" sz="1200" dirty="0"/>
           </a:p>
           <a:p>
-            <a:pPr indent="0" marL="0">
+            <a:pPr marL="0" indent="0">
               <a:buNone/>
             </a:pPr>
             <a:r>
@@ -11311,7 +11568,7 @@
           <a:bodyPr wrap="square" lIns="0" tIns="0" rIns="0" bIns="0" rtlCol="0" anchor="ctr"/>
           <a:lstStyle/>
           <a:p>
-            <a:pPr indent="0" marL="0">
+            <a:pPr marL="0" indent="0">
               <a:buNone/>
             </a:pPr>
             <a:r>
@@ -11373,6 +11630,13 @@
           </a:solidFill>
           <a:ln/>
         </p:spPr>
+        <p:txBody>
+          <a:bodyPr/>
+          <a:lstStyle/>
+          <a:p>
+            <a:endParaRPr lang="en-US"/>
+          </a:p>
+        </p:txBody>
       </p:sp>
       <p:sp>
         <p:nvSpPr>
@@ -11395,11 +11659,11 @@
           <a:bodyPr wrap="square" lIns="0" tIns="0" rIns="0" bIns="0" rtlCol="0" anchor="ctr"/>
           <a:lstStyle/>
           <a:p>
-            <a:pPr indent="0" marL="0">
-              <a:buNone/>
-            </a:pPr>
-            <a:r>
-              <a:rPr lang="en-US" sz="1100" spc="60" kern="0" dirty="0">
+            <a:pPr marL="0" indent="0">
+              <a:buNone/>
+            </a:pPr>
+            <a:r>
+              <a:rPr lang="en-US" sz="1100" kern="0" spc="60" dirty="0">
                 <a:solidFill>
                   <a:srgbClr val="6B7A85"/>
                 </a:solidFill>
@@ -11434,7 +11698,7 @@
           <a:bodyPr wrap="square" lIns="0" tIns="0" rIns="0" bIns="0" rtlCol="0" anchor="t"/>
           <a:lstStyle/>
           <a:p>
-            <a:pPr indent="0" marL="0">
+            <a:pPr marL="0" indent="0">
               <a:buNone/>
             </a:pPr>
             <a:r>
@@ -11478,6 +11742,13 @@
             <a:prstDash val="solid"/>
           </a:ln>
         </p:spPr>
+        <p:txBody>
+          <a:bodyPr/>
+          <a:lstStyle/>
+          <a:p>
+            <a:endParaRPr lang="en-US"/>
+          </a:p>
+        </p:txBody>
       </p:sp>
       <p:sp>
         <p:nvSpPr>
@@ -11500,7 +11771,7 @@
           <a:bodyPr wrap="square" lIns="0" tIns="0" rIns="0" bIns="0" rtlCol="0" anchor="ctr"/>
           <a:lstStyle/>
           <a:p>
-            <a:pPr indent="0" marL="0">
+            <a:pPr marL="0" indent="0">
               <a:buNone/>
             </a:pPr>
             <a:r>
@@ -11539,7 +11810,7 @@
           <a:bodyPr wrap="square" lIns="0" tIns="0" rIns="0" bIns="0" rtlCol="0" anchor="ctr"/>
           <a:lstStyle/>
           <a:p>
-            <a:pPr indent="0" marL="0">
+            <a:pPr marL="0" indent="0">
               <a:buNone/>
             </a:pPr>
             <a:r>
@@ -11583,6 +11854,13 @@
             <a:prstDash val="solid"/>
           </a:ln>
         </p:spPr>
+        <p:txBody>
+          <a:bodyPr/>
+          <a:lstStyle/>
+          <a:p>
+            <a:endParaRPr lang="en-US"/>
+          </a:p>
+        </p:txBody>
       </p:sp>
       <p:sp>
         <p:nvSpPr>
@@ -11605,7 +11883,7 @@
           <a:bodyPr wrap="square" lIns="0" tIns="0" rIns="0" bIns="0" rtlCol="0" anchor="ctr"/>
           <a:lstStyle/>
           <a:p>
-            <a:pPr indent="0" marL="0">
+            <a:pPr marL="0" indent="0">
               <a:buNone/>
             </a:pPr>
             <a:r>
@@ -11644,7 +11922,7 @@
           <a:bodyPr wrap="square" lIns="0" tIns="0" rIns="0" bIns="0" rtlCol="0" anchor="ctr"/>
           <a:lstStyle/>
           <a:p>
-            <a:pPr indent="0" marL="0">
+            <a:pPr marL="0" indent="0">
               <a:buNone/>
             </a:pPr>
             <a:r>
@@ -11688,6 +11966,13 @@
             <a:prstDash val="solid"/>
           </a:ln>
         </p:spPr>
+        <p:txBody>
+          <a:bodyPr/>
+          <a:lstStyle/>
+          <a:p>
+            <a:endParaRPr lang="en-US"/>
+          </a:p>
+        </p:txBody>
       </p:sp>
       <p:sp>
         <p:nvSpPr>
@@ -11710,7 +11995,7 @@
           <a:bodyPr wrap="square" lIns="0" tIns="0" rIns="0" bIns="0" rtlCol="0" anchor="ctr"/>
           <a:lstStyle/>
           <a:p>
-            <a:pPr indent="0" marL="0">
+            <a:pPr marL="0" indent="0">
               <a:buNone/>
             </a:pPr>
             <a:r>
@@ -11749,7 +12034,7 @@
           <a:bodyPr wrap="square" lIns="0" tIns="0" rIns="0" bIns="0" rtlCol="0" anchor="ctr"/>
           <a:lstStyle/>
           <a:p>
-            <a:pPr indent="0" marL="0">
+            <a:pPr marL="0" indent="0">
               <a:buNone/>
             </a:pPr>
             <a:r>
@@ -11793,6 +12078,13 @@
             <a:prstDash val="solid"/>
           </a:ln>
         </p:spPr>
+        <p:txBody>
+          <a:bodyPr/>
+          <a:lstStyle/>
+          <a:p>
+            <a:endParaRPr lang="en-US"/>
+          </a:p>
+        </p:txBody>
       </p:sp>
       <p:sp>
         <p:nvSpPr>
@@ -11815,7 +12107,7 @@
           <a:bodyPr wrap="square" lIns="0" tIns="0" rIns="0" bIns="0" rtlCol="0" anchor="ctr"/>
           <a:lstStyle/>
           <a:p>
-            <a:pPr indent="0" marL="0">
+            <a:pPr marL="0" indent="0">
               <a:buNone/>
             </a:pPr>
             <a:r>
@@ -11854,7 +12146,7 @@
           <a:bodyPr wrap="square" lIns="0" tIns="0" rIns="0" bIns="0" rtlCol="0" anchor="ctr"/>
           <a:lstStyle/>
           <a:p>
-            <a:pPr indent="0" marL="0">
+            <a:pPr marL="0" indent="0">
               <a:buNone/>
             </a:pPr>
             <a:r>
@@ -11893,7 +12185,7 @@
           <a:bodyPr wrap="square" lIns="0" tIns="0" rIns="0" bIns="0" rtlCol="0" anchor="ctr"/>
           <a:lstStyle/>
           <a:p>
-            <a:pPr indent="0" marL="0">
+            <a:pPr marL="0" indent="0">
               <a:buNone/>
             </a:pPr>
             <a:r>
@@ -11955,6 +12247,13 @@
           </a:solidFill>
           <a:ln/>
         </p:spPr>
+        <p:txBody>
+          <a:bodyPr/>
+          <a:lstStyle/>
+          <a:p>
+            <a:endParaRPr lang="en-US"/>
+          </a:p>
+        </p:txBody>
       </p:sp>
       <p:sp>
         <p:nvSpPr>
@@ -11977,11 +12276,11 @@
           <a:bodyPr wrap="square" lIns="0" tIns="0" rIns="0" bIns="0" rtlCol="0" anchor="ctr"/>
           <a:lstStyle/>
           <a:p>
-            <a:pPr indent="0" marL="0">
-              <a:buNone/>
-            </a:pPr>
-            <a:r>
-              <a:rPr lang="en-US" sz="1100" spc="60" kern="0" dirty="0">
+            <a:pPr marL="0" indent="0">
+              <a:buNone/>
+            </a:pPr>
+            <a:r>
+              <a:rPr lang="en-US" sz="1100" kern="0" spc="60" dirty="0">
                 <a:solidFill>
                   <a:srgbClr val="6B7A85"/>
                 </a:solidFill>
@@ -12016,7 +12315,7 @@
           <a:bodyPr wrap="square" lIns="0" tIns="0" rIns="0" bIns="0" rtlCol="0" anchor="t"/>
           <a:lstStyle/>
           <a:p>
-            <a:pPr indent="0" marL="0">
+            <a:pPr marL="0" indent="0">
               <a:buNone/>
             </a:pPr>
             <a:r>
@@ -12060,6 +12359,13 @@
             <a:prstDash val="solid"/>
           </a:ln>
         </p:spPr>
+        <p:txBody>
+          <a:bodyPr/>
+          <a:lstStyle/>
+          <a:p>
+            <a:endParaRPr lang="en-US"/>
+          </a:p>
+        </p:txBody>
       </p:sp>
       <p:sp>
         <p:nvSpPr>
@@ -12082,7 +12388,7 @@
           <a:bodyPr wrap="square" lIns="0" tIns="0" rIns="0" bIns="0" rtlCol="0" anchor="ctr"/>
           <a:lstStyle/>
           <a:p>
-            <a:pPr indent="0" marL="0">
+            <a:pPr marL="0" indent="0">
               <a:buNone/>
             </a:pPr>
             <a:r>
@@ -12121,7 +12427,7 @@
           <a:bodyPr wrap="square" lIns="0" tIns="0" rIns="0" bIns="0" rtlCol="0" anchor="ctr"/>
           <a:lstStyle/>
           <a:p>
-            <a:pPr indent="0" marL="0">
+            <a:pPr marL="0" indent="0">
               <a:buNone/>
             </a:pPr>
             <a:r>
@@ -12160,7 +12466,7 @@
           <a:bodyPr wrap="square" lIns="0" tIns="0" rIns="0" bIns="0" rtlCol="0" anchor="ctr"/>
           <a:lstStyle/>
           <a:p>
-            <a:pPr indent="0" marL="0">
+            <a:pPr marL="0" indent="0">
               <a:buNone/>
             </a:pPr>
             <a:r>
@@ -12204,6 +12510,13 @@
             <a:prstDash val="solid"/>
           </a:ln>
         </p:spPr>
+        <p:txBody>
+          <a:bodyPr/>
+          <a:lstStyle/>
+          <a:p>
+            <a:endParaRPr lang="en-US"/>
+          </a:p>
+        </p:txBody>
       </p:sp>
       <p:sp>
         <p:nvSpPr>
@@ -12226,7 +12539,7 @@
           <a:bodyPr wrap="square" lIns="0" tIns="0" rIns="0" bIns="0" rtlCol="0" anchor="ctr"/>
           <a:lstStyle/>
           <a:p>
-            <a:pPr indent="0" marL="0">
+            <a:pPr marL="0" indent="0">
               <a:buNone/>
             </a:pPr>
             <a:r>
@@ -12265,7 +12578,7 @@
           <a:bodyPr wrap="square" lIns="0" tIns="0" rIns="0" bIns="0" rtlCol="0" anchor="ctr"/>
           <a:lstStyle/>
           <a:p>
-            <a:pPr indent="0" marL="0">
+            <a:pPr marL="0" indent="0">
               <a:buNone/>
             </a:pPr>
             <a:r>
@@ -12304,7 +12617,7 @@
           <a:bodyPr wrap="square" lIns="0" tIns="0" rIns="0" bIns="0" rtlCol="0" anchor="ctr"/>
           <a:lstStyle/>
           <a:p>
-            <a:pPr indent="0" marL="0">
+            <a:pPr marL="0" indent="0">
               <a:buNone/>
             </a:pPr>
             <a:r>
@@ -12348,6 +12661,13 @@
             <a:prstDash val="solid"/>
           </a:ln>
         </p:spPr>
+        <p:txBody>
+          <a:bodyPr/>
+          <a:lstStyle/>
+          <a:p>
+            <a:endParaRPr lang="en-US"/>
+          </a:p>
+        </p:txBody>
       </p:sp>
       <p:sp>
         <p:nvSpPr>
@@ -12370,7 +12690,7 @@
           <a:bodyPr wrap="square" lIns="0" tIns="0" rIns="0" bIns="0" rtlCol="0" anchor="ctr"/>
           <a:lstStyle/>
           <a:p>
-            <a:pPr indent="0" marL="0">
+            <a:pPr marL="0" indent="0">
               <a:buNone/>
             </a:pPr>
             <a:r>
@@ -12409,7 +12729,7 @@
           <a:bodyPr wrap="square" lIns="0" tIns="0" rIns="0" bIns="0" rtlCol="0" anchor="ctr"/>
           <a:lstStyle/>
           <a:p>
-            <a:pPr indent="0" marL="0">
+            <a:pPr marL="0" indent="0">
               <a:buNone/>
             </a:pPr>
             <a:r>
@@ -12448,7 +12768,7 @@
           <a:bodyPr wrap="square" lIns="0" tIns="0" rIns="0" bIns="0" rtlCol="0" anchor="ctr"/>
           <a:lstStyle/>
           <a:p>
-            <a:pPr indent="0" marL="0">
+            <a:pPr marL="0" indent="0">
               <a:buNone/>
             </a:pPr>
             <a:r>
@@ -12487,7 +12807,7 @@
           <a:bodyPr wrap="square" lIns="0" tIns="0" rIns="0" bIns="0" rtlCol="0" anchor="ctr"/>
           <a:lstStyle/>
           <a:p>
-            <a:pPr indent="0" marL="0">
+            <a:pPr marL="0" indent="0">
               <a:buNone/>
             </a:pPr>
             <a:r>
@@ -12806,4 +13126,319 @@
     </a:ext>
   </a:extLst>
 </a:theme>
+</file>
+
+<file path=ppt/theme/theme2.xml><?xml version="1.0" encoding="utf-8"?>
+<a:theme xmlns:a="http://schemas.openxmlformats.org/drawingml/2006/main" name="Office Theme">
+  <a:themeElements>
+    <a:clrScheme name="Office">
+      <a:dk1>
+        <a:sysClr val="windowText" lastClr="000000"/>
+      </a:dk1>
+      <a:lt1>
+        <a:sysClr val="window" lastClr="FFFFFF"/>
+      </a:lt1>
+      <a:dk2>
+        <a:srgbClr val="0E2841"/>
+      </a:dk2>
+      <a:lt2>
+        <a:srgbClr val="E8E8E8"/>
+      </a:lt2>
+      <a:accent1>
+        <a:srgbClr val="156082"/>
+      </a:accent1>
+      <a:accent2>
+        <a:srgbClr val="E97132"/>
+      </a:accent2>
+      <a:accent3>
+        <a:srgbClr val="196B24"/>
+      </a:accent3>
+      <a:accent4>
+        <a:srgbClr val="0F9ED5"/>
+      </a:accent4>
+      <a:accent5>
+        <a:srgbClr val="A02B93"/>
+      </a:accent5>
+      <a:accent6>
+        <a:srgbClr val="4EA72E"/>
+      </a:accent6>
+      <a:hlink>
+        <a:srgbClr val="467886"/>
+      </a:hlink>
+      <a:folHlink>
+        <a:srgbClr val="96607D"/>
+      </a:folHlink>
+    </a:clrScheme>
+    <a:fontScheme name="Office">
+      <a:majorFont>
+        <a:latin typeface="Aptos Display" panose="02110004020202020204"/>
+        <a:ea typeface=""/>
+        <a:cs typeface=""/>
+        <a:font script="Jpan" typeface="游ゴシック Light"/>
+        <a:font script="Hang" typeface="맑은 고딕"/>
+        <a:font script="Hans" typeface="等线 Light"/>
+        <a:font script="Hant" typeface="新細明體"/>
+        <a:font script="Arab" typeface="Times New Roman"/>
+        <a:font script="Hebr" typeface="Times New Roman"/>
+        <a:font script="Thai" typeface="Angsana New"/>
+        <a:font script="Ethi" typeface="Nyala"/>
+        <a:font script="Beng" typeface="Vrinda"/>
+        <a:font script="Gujr" typeface="Shruti"/>
+        <a:font script="Khmr" typeface="MoolBoran"/>
+        <a:font script="Knda" typeface="Tunga"/>
+        <a:font script="Guru" typeface="Raavi"/>
+        <a:font script="Cans" typeface="Euphemia"/>
+        <a:font script="Cher" typeface="Plantagenet Cherokee"/>
+        <a:font script="Yiii" typeface="Microsoft Yi Baiti"/>
+        <a:font script="Tibt" typeface="Microsoft Himalaya"/>
+        <a:font script="Thaa" typeface="MV Boli"/>
+        <a:font script="Deva" typeface="Mangal"/>
+        <a:font script="Telu" typeface="Gautami"/>
+        <a:font script="Taml" typeface="Latha"/>
+        <a:font script="Syrc" typeface="Estrangelo Edessa"/>
+        <a:font script="Orya" typeface="Kalinga"/>
+        <a:font script="Mlym" typeface="Kartika"/>
+        <a:font script="Laoo" typeface="DokChampa"/>
+        <a:font script="Sinh" typeface="Iskoola Pota"/>
+        <a:font script="Mong" typeface="Mongolian Baiti"/>
+        <a:font script="Viet" typeface="Times New Roman"/>
+        <a:font script="Uigh" typeface="Microsoft Uighur"/>
+        <a:font script="Geor" typeface="Sylfaen"/>
+        <a:font script="Armn" typeface="Arial"/>
+        <a:font script="Bugi" typeface="Leelawadee UI"/>
+        <a:font script="Bopo" typeface="Microsoft JhengHei"/>
+        <a:font script="Java" typeface="Javanese Text"/>
+        <a:font script="Lisu" typeface="Segoe UI"/>
+        <a:font script="Mymr" typeface="Myanmar Text"/>
+        <a:font script="Nkoo" typeface="Ebrima"/>
+        <a:font script="Olck" typeface="Nirmala UI"/>
+        <a:font script="Osma" typeface="Ebrima"/>
+        <a:font script="Phag" typeface="Phagspa"/>
+        <a:font script="Syrn" typeface="Estrangelo Edessa"/>
+        <a:font script="Syrj" typeface="Estrangelo Edessa"/>
+        <a:font script="Syre" typeface="Estrangelo Edessa"/>
+        <a:font script="Sora" typeface="Nirmala UI"/>
+        <a:font script="Tale" typeface="Microsoft Tai Le"/>
+        <a:font script="Talu" typeface="Microsoft New Tai Lue"/>
+        <a:font script="Tfng" typeface="Ebrima"/>
+      </a:majorFont>
+      <a:minorFont>
+        <a:latin typeface="Aptos" panose="02110004020202020204"/>
+        <a:ea typeface=""/>
+        <a:cs typeface=""/>
+        <a:font script="Jpan" typeface="游ゴシック"/>
+        <a:font script="Hang" typeface="맑은 고딕"/>
+        <a:font script="Hans" typeface="等线"/>
+        <a:font script="Hant" typeface="新細明體"/>
+        <a:font script="Arab" typeface="Arial"/>
+        <a:font script="Hebr" typeface="Arial"/>
+        <a:font script="Thai" typeface="Cordia New"/>
+        <a:font script="Ethi" typeface="Nyala"/>
+        <a:font script="Beng" typeface="Vrinda"/>
+        <a:font script="Gujr" typeface="Shruti"/>
+        <a:font script="Khmr" typeface="DaunPenh"/>
+        <a:font script="Knda" typeface="Tunga"/>
+        <a:font script="Guru" typeface="Raavi"/>
+        <a:font script="Cans" typeface="Euphemia"/>
+        <a:font script="Cher" typeface="Plantagenet Cherokee"/>
+        <a:font script="Yiii" typeface="Microsoft Yi Baiti"/>
+        <a:font script="Tibt" typeface="Microsoft Himalaya"/>
+        <a:font script="Thaa" typeface="MV Boli"/>
+        <a:font script="Deva" typeface="Mangal"/>
+        <a:font script="Telu" typeface="Gautami"/>
+        <a:font script="Taml" typeface="Latha"/>
+        <a:font script="Syrc" typeface="Estrangelo Edessa"/>
+        <a:font script="Orya" typeface="Kalinga"/>
+        <a:font script="Mlym" typeface="Kartika"/>
+        <a:font script="Laoo" typeface="DokChampa"/>
+        <a:font script="Sinh" typeface="Iskoola Pota"/>
+        <a:font script="Mong" typeface="Mongolian Baiti"/>
+        <a:font script="Viet" typeface="Arial"/>
+        <a:font script="Uigh" typeface="Microsoft Uighur"/>
+        <a:font script="Geor" typeface="Sylfaen"/>
+        <a:font script="Armn" typeface="Arial"/>
+        <a:font script="Bugi" typeface="Leelawadee UI"/>
+        <a:font script="Bopo" typeface="Microsoft JhengHei"/>
+        <a:font script="Java" typeface="Javanese Text"/>
+        <a:font script="Lisu" typeface="Segoe UI"/>
+        <a:font script="Mymr" typeface="Myanmar Text"/>
+        <a:font script="Nkoo" typeface="Ebrima"/>
+        <a:font script="Olck" typeface="Nirmala UI"/>
+        <a:font script="Osma" typeface="Ebrima"/>
+        <a:font script="Phag" typeface="Phagspa"/>
+        <a:font script="Syrn" typeface="Estrangelo Edessa"/>
+        <a:font script="Syrj" typeface="Estrangelo Edessa"/>
+        <a:font script="Syre" typeface="Estrangelo Edessa"/>
+        <a:font script="Sora" typeface="Nirmala UI"/>
+        <a:font script="Tale" typeface="Microsoft Tai Le"/>
+        <a:font script="Talu" typeface="Microsoft New Tai Lue"/>
+        <a:font script="Tfng" typeface="Ebrima"/>
+      </a:minorFont>
+    </a:fontScheme>
+    <a:fmtScheme name="Office">
+      <a:fillStyleLst>
+        <a:solidFill>
+          <a:schemeClr val="phClr"/>
+        </a:solidFill>
+        <a:gradFill rotWithShape="1">
+          <a:gsLst>
+            <a:gs pos="0">
+              <a:schemeClr val="phClr">
+                <a:lumMod val="110000"/>
+                <a:satMod val="105000"/>
+                <a:tint val="67000"/>
+              </a:schemeClr>
+            </a:gs>
+            <a:gs pos="50000">
+              <a:schemeClr val="phClr">
+                <a:lumMod val="105000"/>
+                <a:satMod val="103000"/>
+                <a:tint val="73000"/>
+              </a:schemeClr>
+            </a:gs>
+            <a:gs pos="100000">
+              <a:schemeClr val="phClr">
+                <a:lumMod val="105000"/>
+                <a:satMod val="109000"/>
+                <a:tint val="81000"/>
+              </a:schemeClr>
+            </a:gs>
+          </a:gsLst>
+          <a:lin ang="5400000" scaled="0"/>
+        </a:gradFill>
+        <a:gradFill rotWithShape="1">
+          <a:gsLst>
+            <a:gs pos="0">
+              <a:schemeClr val="phClr">
+                <a:satMod val="103000"/>
+                <a:lumMod val="102000"/>
+                <a:tint val="94000"/>
+              </a:schemeClr>
+            </a:gs>
+            <a:gs pos="50000">
+              <a:schemeClr val="phClr">
+                <a:satMod val="110000"/>
+                <a:lumMod val="100000"/>
+                <a:shade val="100000"/>
+              </a:schemeClr>
+            </a:gs>
+            <a:gs pos="100000">
+              <a:schemeClr val="phClr">
+                <a:lumMod val="99000"/>
+                <a:satMod val="120000"/>
+                <a:shade val="78000"/>
+              </a:schemeClr>
+            </a:gs>
+          </a:gsLst>
+          <a:lin ang="5400000" scaled="0"/>
+        </a:gradFill>
+      </a:fillStyleLst>
+      <a:lnStyleLst>
+        <a:ln w="12700" cap="flat" cmpd="sng" algn="ctr">
+          <a:solidFill>
+            <a:schemeClr val="phClr"/>
+          </a:solidFill>
+          <a:prstDash val="solid"/>
+          <a:miter lim="800000"/>
+        </a:ln>
+        <a:ln w="19050" cap="flat" cmpd="sng" algn="ctr">
+          <a:solidFill>
+            <a:schemeClr val="phClr"/>
+          </a:solidFill>
+          <a:prstDash val="solid"/>
+          <a:miter lim="800000"/>
+        </a:ln>
+        <a:ln w="25400" cap="flat" cmpd="sng" algn="ctr">
+          <a:solidFill>
+            <a:schemeClr val="phClr"/>
+          </a:solidFill>
+          <a:prstDash val="solid"/>
+          <a:miter lim="800000"/>
+        </a:ln>
+      </a:lnStyleLst>
+      <a:effectStyleLst>
+        <a:effectStyle>
+          <a:effectLst/>
+        </a:effectStyle>
+        <a:effectStyle>
+          <a:effectLst/>
+        </a:effectStyle>
+        <a:effectStyle>
+          <a:effectLst>
+            <a:outerShdw blurRad="57150" dist="19050" dir="5400000" algn="ctr" rotWithShape="0">
+              <a:srgbClr val="000000">
+                <a:alpha val="63000"/>
+              </a:srgbClr>
+            </a:outerShdw>
+          </a:effectLst>
+        </a:effectStyle>
+      </a:effectStyleLst>
+      <a:bgFillStyleLst>
+        <a:solidFill>
+          <a:schemeClr val="phClr"/>
+        </a:solidFill>
+        <a:solidFill>
+          <a:schemeClr val="phClr">
+            <a:tint val="95000"/>
+            <a:satMod val="170000"/>
+          </a:schemeClr>
+        </a:solidFill>
+        <a:gradFill rotWithShape="1">
+          <a:gsLst>
+            <a:gs pos="0">
+              <a:schemeClr val="phClr">
+                <a:tint val="93000"/>
+                <a:satMod val="150000"/>
+                <a:shade val="98000"/>
+                <a:lumMod val="102000"/>
+              </a:schemeClr>
+            </a:gs>
+            <a:gs pos="50000">
+              <a:schemeClr val="phClr">
+                <a:tint val="98000"/>
+                <a:satMod val="130000"/>
+                <a:shade val="90000"/>
+                <a:lumMod val="103000"/>
+              </a:schemeClr>
+            </a:gs>
+            <a:gs pos="100000">
+              <a:schemeClr val="phClr">
+                <a:shade val="63000"/>
+                <a:satMod val="120000"/>
+              </a:schemeClr>
+            </a:gs>
+          </a:gsLst>
+          <a:lin ang="5400000" scaled="0"/>
+        </a:gradFill>
+      </a:bgFillStyleLst>
+    </a:fmtScheme>
+  </a:themeElements>
+  <a:objectDefaults>
+    <a:lnDef>
+      <a:spPr/>
+      <a:bodyPr/>
+      <a:lstStyle/>
+      <a:style>
+        <a:lnRef idx="2">
+          <a:schemeClr val="accent1"/>
+        </a:lnRef>
+        <a:fillRef idx="0">
+          <a:schemeClr val="accent1"/>
+        </a:fillRef>
+        <a:effectRef idx="1">
+          <a:schemeClr val="accent1"/>
+        </a:effectRef>
+        <a:fontRef idx="minor">
+          <a:schemeClr val="tx1"/>
+        </a:fontRef>
+      </a:style>
+    </a:lnDef>
+  </a:objectDefaults>
+  <a:extraClrSchemeLst/>
+  <a:extLst>
+    <a:ext uri="{05A4C25C-085E-4340-85A3-A5531E510DB2}">
+      <thm15:themeFamily xmlns:thm15="http://schemas.microsoft.com/office/thememl/2012/main" name="Office Theme" id="{2E142A2C-CD16-42D6-873A-C26D2A0506FA}" vid="{1BDDFF52-6CD6-40A5-AB3C-68EB2F1E4D0A}"/>
+    </a:ext>
+  </a:extLst>
+</a:theme>
 </file>